--- a/presentation/Thorn-and-Furrow-Portfolio.pptx
+++ b/presentation/Thorn-and-Furrow-Portfolio.pptx
@@ -4,24 +4,27 @@
   <p:sldMasterIdLst>
     <p:sldMasterId id="2147483648" r:id="rId1"/>
   </p:sldMasterIdLst>
+  <p:notesMasterIdLst>
+    <p:notesMasterId r:id="rId17"/>
+  </p:notesMasterIdLst>
   <p:sldIdLst>
-    <p:sldId id="256" r:id="rId7"/>
-    <p:sldId id="257" r:id="rId9"/>
-    <p:sldId id="258" r:id="rId10"/>
-    <p:sldId id="259" r:id="rId11"/>
-    <p:sldId id="260" r:id="rId12"/>
-    <p:sldId id="261" r:id="rId13"/>
-    <p:sldId id="262" r:id="rId14"/>
-    <p:sldId id="263" r:id="rId15"/>
-    <p:sldId id="264" r:id="rId16"/>
-    <p:sldId id="265" r:id="rId17"/>
-    <p:sldId id="266" r:id="rId18"/>
-    <p:sldId id="267" r:id="rId19"/>
-    <p:sldId id="268" r:id="rId20"/>
-    <p:sldId id="269" r:id="rId21"/>
-    <p:sldId id="270" r:id="rId22"/>
+    <p:sldId id="256" r:id="rId2"/>
+    <p:sldId id="257" r:id="rId3"/>
+    <p:sldId id="258" r:id="rId4"/>
+    <p:sldId id="259" r:id="rId5"/>
+    <p:sldId id="260" r:id="rId6"/>
+    <p:sldId id="261" r:id="rId7"/>
+    <p:sldId id="262" r:id="rId8"/>
+    <p:sldId id="263" r:id="rId9"/>
+    <p:sldId id="264" r:id="rId10"/>
+    <p:sldId id="265" r:id="rId11"/>
+    <p:sldId id="266" r:id="rId12"/>
+    <p:sldId id="267" r:id="rId13"/>
+    <p:sldId id="268" r:id="rId14"/>
+    <p:sldId id="269" r:id="rId15"/>
+    <p:sldId id="270" r:id="rId16"/>
   </p:sldIdLst>
-  <p:sldSz cx="12191695" cy="6858000" type="screen4x3"/>
+  <p:sldSz cx="12192000" cy="6858000"/>
   <p:notesSz cx="6858000" cy="9144000"/>
   <p:defaultTextStyle>
     <a:defPPr>
@@ -118,11 +121,27 @@
       </a:defRPr>
     </a:lvl9pPr>
   </p:defaultTextStyle>
+  <p:extLst>
+    <p:ext uri="{EFAFB233-063F-42B5-8137-9DF3F51BA10A}">
+      <p15:sldGuideLst xmlns:p15="http://schemas.microsoft.com/office/powerpoint/2012/main">
+        <p15:guide id="1" orient="horz" pos="2160">
+          <p15:clr>
+            <a:srgbClr val="A4A3A4"/>
+          </p15:clr>
+        </p15:guide>
+        <p15:guide id="2" pos="2880">
+          <p15:clr>
+            <a:srgbClr val="A4A3A4"/>
+          </p15:clr>
+        </p15:guide>
+      </p15:sldGuideLst>
+    </p:ext>
+  </p:extLst>
 </p:presentation>
 </file>
 
 <file path=ppt/notesMasters/notesMaster1.xml><?xml version="1.0" encoding="utf-8"?>
-<p:notesMaster xmlns:a="http://schemas.openxmlformats.org/drawingml/2006/main" xmlns:p="http://schemas.openxmlformats.org/presentationml/2006/main" xmlns:r="http://schemas.openxmlformats.org/officeDocument/2006/relationships">
+<p:notesMaster xmlns:a="http://schemas.openxmlformats.org/drawingml/2006/main" xmlns:r="http://schemas.openxmlformats.org/officeDocument/2006/relationships" xmlns:p="http://schemas.openxmlformats.org/presentationml/2006/main">
   <p:cSld>
     <p:bg>
       <p:bgRef idx="1001">
@@ -143,241 +162,16 @@
           <a:chExt cx="0" cy="0"/>
         </a:xfrm>
       </p:grpSpPr>
-      <p:sp>
-        <p:nvSpPr>
-          <p:cNvPr id="2" name="Header Placeholder 1"/>
-          <p:cNvSpPr>
-            <a:spLocks noGrp="1"/>
-          </p:cNvSpPr>
-          <p:nvPr>
-            <p:ph type="hdr" sz="quarter"/>
-          </p:nvPr>
-        </p:nvSpPr>
-        <p:spPr>
-          <a:xfrm>
-            <a:off x="0" y="0"/>
-            <a:ext cx="2971800" cy="457200"/>
-          </a:xfrm>
-          <a:prstGeom prst="rect">
-            <a:avLst/>
-          </a:prstGeom>
-        </p:spPr>
-        <p:txBody>
-          <a:bodyPr vert="horz" lIns="91440" tIns="45720" rIns="91440" bIns="45720" rtlCol="0"/>
-          <a:lstStyle>
-            <a:lvl1pPr algn="l">
-              <a:defRPr sz="1200"/>
-            </a:lvl1pPr>
-          </a:lstStyle>
-          <a:p>
-            <a:endParaRPr lang="en-US"/>
-          </a:p>
-        </p:txBody>
-      </p:sp>
-      <p:sp>
-        <p:nvSpPr>
-          <p:cNvPr id="3" name="Date Placeholder 2"/>
-          <p:cNvSpPr>
-            <a:spLocks noGrp="1"/>
-          </p:cNvSpPr>
-          <p:nvPr>
-            <p:ph type="dt" idx="1"/>
-          </p:nvPr>
-        </p:nvSpPr>
-        <p:spPr>
-          <a:xfrm>
-            <a:off x="3884613" y="0"/>
-            <a:ext cx="2971800" cy="457200"/>
-          </a:xfrm>
-          <a:prstGeom prst="rect">
-            <a:avLst/>
-          </a:prstGeom>
-        </p:spPr>
-        <p:txBody>
-          <a:bodyPr vert="horz" lIns="91440" tIns="45720" rIns="91440" bIns="45720" rtlCol="0"/>
-          <a:lstStyle>
-            <a:lvl1pPr algn="r">
-              <a:defRPr sz="1200"/>
-            </a:lvl1pPr>
-          </a:lstStyle>
-          <a:p>
-            <a:fld id="{0F89C1C7-3DCD-1040-A9CF-14679D8B5DDD}" type="datetimeFigureOut">
-              <a:rPr lang="en-US" smtClean="0"/>
-              <a:t>10/17/16</a:t>
-            </a:fld>
-            <a:endParaRPr lang="en-US"/>
-          </a:p>
-        </p:txBody>
-      </p:sp>
-      <p:sp>
-        <p:nvSpPr>
-          <p:cNvPr id="4" name="Slide Image Placeholder 3"/>
-          <p:cNvSpPr>
-            <a:spLocks noGrp="1" noRot="1" noChangeAspect="1"/>
-          </p:cNvSpPr>
-          <p:nvPr>
-            <p:ph type="sldImg" idx="2"/>
-          </p:nvPr>
-        </p:nvSpPr>
-        <p:spPr>
-          <a:xfrm>
-            <a:off x="1143000" y="685800"/>
-            <a:ext cx="4572000" cy="3429000"/>
-          </a:xfrm>
-          <a:prstGeom prst="rect">
-            <a:avLst/>
-          </a:prstGeom>
-          <a:noFill/>
-          <a:ln w="12700">
-            <a:solidFill>
-              <a:prstClr val="black"/>
-            </a:solidFill>
-          </a:ln>
-        </p:spPr>
-        <p:txBody>
-          <a:bodyPr vert="horz" lIns="91440" tIns="45720" rIns="91440" bIns="45720" rtlCol="0" anchor="ctr"/>
-          <a:lstStyle/>
-          <a:p>
-            <a:endParaRPr lang="en-US"/>
-          </a:p>
-        </p:txBody>
-      </p:sp>
-      <p:sp>
-        <p:nvSpPr>
-          <p:cNvPr id="5" name="Notes Placeholder 4"/>
-          <p:cNvSpPr>
-            <a:spLocks noGrp="1"/>
-          </p:cNvSpPr>
-          <p:nvPr>
-            <p:ph type="body" sz="quarter" idx="3"/>
-          </p:nvPr>
-        </p:nvSpPr>
-        <p:spPr>
-          <a:xfrm>
-            <a:off x="685800" y="4343400"/>
-            <a:ext cx="5486400" cy="4114800"/>
-          </a:xfrm>
-          <a:prstGeom prst="rect">
-            <a:avLst/>
-          </a:prstGeom>
-        </p:spPr>
-        <p:txBody>
-          <a:bodyPr vert="horz" lIns="91440" tIns="45720" rIns="91440" bIns="45720" rtlCol="0"/>
-          <a:lstStyle/>
-          <a:p>
-            <a:pPr lvl="0"/>
-            <a:r>
-              <a:rPr lang="en-US" smtClean="0"/>
-              <a:t>Click to edit Master text styles</a:t>
-            </a:r>
-          </a:p>
-          <a:p>
-            <a:pPr lvl="1"/>
-            <a:r>
-              <a:rPr lang="en-US" smtClean="0"/>
-              <a:t>Second level</a:t>
-            </a:r>
-          </a:p>
-          <a:p>
-            <a:pPr lvl="2"/>
-            <a:r>
-              <a:rPr lang="en-US" smtClean="0"/>
-              <a:t>Third level</a:t>
-            </a:r>
-          </a:p>
-          <a:p>
-            <a:pPr lvl="3"/>
-            <a:r>
-              <a:rPr lang="en-US" smtClean="0"/>
-              <a:t>Fourth level</a:t>
-            </a:r>
-          </a:p>
-          <a:p>
-            <a:pPr lvl="4"/>
-            <a:r>
-              <a:rPr lang="en-US" smtClean="0"/>
-              <a:t>Fifth level</a:t>
-            </a:r>
-            <a:endParaRPr lang="en-US"/>
-          </a:p>
-        </p:txBody>
-      </p:sp>
-      <p:sp>
-        <p:nvSpPr>
-          <p:cNvPr id="6" name="Footer Placeholder 5"/>
-          <p:cNvSpPr>
-            <a:spLocks noGrp="1"/>
-          </p:cNvSpPr>
-          <p:nvPr>
-            <p:ph type="ftr" sz="quarter" idx="4"/>
-          </p:nvPr>
-        </p:nvSpPr>
-        <p:spPr>
-          <a:xfrm>
-            <a:off x="0" y="8685213"/>
-            <a:ext cx="2971800" cy="457200"/>
-          </a:xfrm>
-          <a:prstGeom prst="rect">
-            <a:avLst/>
-          </a:prstGeom>
-        </p:spPr>
-        <p:txBody>
-          <a:bodyPr vert="horz" lIns="91440" tIns="45720" rIns="91440" bIns="45720" rtlCol="0" anchor="b"/>
-          <a:lstStyle>
-            <a:lvl1pPr algn="l">
-              <a:defRPr sz="1200"/>
-            </a:lvl1pPr>
-          </a:lstStyle>
-          <a:p>
-            <a:endParaRPr lang="en-US"/>
-          </a:p>
-        </p:txBody>
-      </p:sp>
-      <p:sp>
-        <p:nvSpPr>
-          <p:cNvPr id="7" name="Slide Number Placeholder 6"/>
-          <p:cNvSpPr>
-            <a:spLocks noGrp="1"/>
-          </p:cNvSpPr>
-          <p:nvPr>
-            <p:ph type="sldNum" sz="quarter" idx="5"/>
-          </p:nvPr>
-        </p:nvSpPr>
-        <p:spPr>
-          <a:xfrm>
-            <a:off x="3884613" y="8685213"/>
-            <a:ext cx="2971800" cy="457200"/>
-          </a:xfrm>
-          <a:prstGeom prst="rect">
-            <a:avLst/>
-          </a:prstGeom>
-        </p:spPr>
-        <p:txBody>
-          <a:bodyPr vert="horz" lIns="91440" tIns="45720" rIns="91440" bIns="45720" rtlCol="0" anchor="b"/>
-          <a:lstStyle>
-            <a:lvl1pPr algn="r">
-              <a:defRPr sz="1200"/>
-            </a:lvl1pPr>
-          </a:lstStyle>
-          <a:p>
-            <a:fld id="{BB5E49A5-4136-284D-997B-48E1D791AD67}" type="slidenum">
-              <a:rPr lang="en-US" smtClean="0"/>
-              <a:t>‹#›</a:t>
-            </a:fld>
-            <a:endParaRPr lang="en-US"/>
-          </a:p>
-        </p:txBody>
-      </p:sp>
     </p:spTree>
     <p:extLst>
       <p:ext uri="{BB962C8B-B14F-4D97-AF65-F5344CB8AC3E}">
-        <p14:creationId xmlns:p14="http://schemas.microsoft.com/office/powerpoint/2010/main" val="2623252185"/>
+        <p14:creationId xmlns:p14="http://schemas.microsoft.com/office/powerpoint/2010/main" val="1600004099"/>
       </p:ext>
     </p:extLst>
   </p:cSld>
   <p:clrMap bg1="lt1" tx1="dk1" bg2="lt2" tx2="dk2" accent1="accent1" accent2="accent2" accent3="accent3" accent4="accent4" accent5="accent5" accent6="accent6" hlink="hlink" folHlink="folHlink"/>
   <p:notesStyle>
-    <a:lvl1pPr marL="0" algn="l" defTabSz="457200" rtl="0" eaLnBrk="1" latinLnBrk="0" hangingPunct="1">
+    <a:lvl1pPr marL="0" algn="l" defTabSz="914400" rtl="0" eaLnBrk="1" latinLnBrk="0" hangingPunct="1">
       <a:defRPr sz="1200" kern="1200">
         <a:solidFill>
           <a:schemeClr val="tx1"/>
@@ -387,7 +181,7 @@
         <a:cs typeface="+mn-cs"/>
       </a:defRPr>
     </a:lvl1pPr>
-    <a:lvl2pPr marL="457200" algn="l" defTabSz="457200" rtl="0" eaLnBrk="1" latinLnBrk="0" hangingPunct="1">
+    <a:lvl2pPr marL="457200" algn="l" defTabSz="914400" rtl="0" eaLnBrk="1" latinLnBrk="0" hangingPunct="1">
       <a:defRPr sz="1200" kern="1200">
         <a:solidFill>
           <a:schemeClr val="tx1"/>
@@ -397,7 +191,7 @@
         <a:cs typeface="+mn-cs"/>
       </a:defRPr>
     </a:lvl2pPr>
-    <a:lvl3pPr marL="914400" algn="l" defTabSz="457200" rtl="0" eaLnBrk="1" latinLnBrk="0" hangingPunct="1">
+    <a:lvl3pPr marL="914400" algn="l" defTabSz="914400" rtl="0" eaLnBrk="1" latinLnBrk="0" hangingPunct="1">
       <a:defRPr sz="1200" kern="1200">
         <a:solidFill>
           <a:schemeClr val="tx1"/>
@@ -407,7 +201,7 @@
         <a:cs typeface="+mn-cs"/>
       </a:defRPr>
     </a:lvl3pPr>
-    <a:lvl4pPr marL="1371600" algn="l" defTabSz="457200" rtl="0" eaLnBrk="1" latinLnBrk="0" hangingPunct="1">
+    <a:lvl4pPr marL="1371600" algn="l" defTabSz="914400" rtl="0" eaLnBrk="1" latinLnBrk="0" hangingPunct="1">
       <a:defRPr sz="1200" kern="1200">
         <a:solidFill>
           <a:schemeClr val="tx1"/>
@@ -417,7 +211,7 @@
         <a:cs typeface="+mn-cs"/>
       </a:defRPr>
     </a:lvl4pPr>
-    <a:lvl5pPr marL="1828800" algn="l" defTabSz="457200" rtl="0" eaLnBrk="1" latinLnBrk="0" hangingPunct="1">
+    <a:lvl5pPr marL="1828800" algn="l" defTabSz="914400" rtl="0" eaLnBrk="1" latinLnBrk="0" hangingPunct="1">
       <a:defRPr sz="1200" kern="1200">
         <a:solidFill>
           <a:schemeClr val="tx1"/>
@@ -427,7 +221,7 @@
         <a:cs typeface="+mn-cs"/>
       </a:defRPr>
     </a:lvl5pPr>
-    <a:lvl6pPr marL="2286000" algn="l" defTabSz="457200" rtl="0" eaLnBrk="1" latinLnBrk="0" hangingPunct="1">
+    <a:lvl6pPr marL="2286000" algn="l" defTabSz="914400" rtl="0" eaLnBrk="1" latinLnBrk="0" hangingPunct="1">
       <a:defRPr sz="1200" kern="1200">
         <a:solidFill>
           <a:schemeClr val="tx1"/>
@@ -437,7 +231,7 @@
         <a:cs typeface="+mn-cs"/>
       </a:defRPr>
     </a:lvl6pPr>
-    <a:lvl7pPr marL="2743200" algn="l" defTabSz="457200" rtl="0" eaLnBrk="1" latinLnBrk="0" hangingPunct="1">
+    <a:lvl7pPr marL="2743200" algn="l" defTabSz="914400" rtl="0" eaLnBrk="1" latinLnBrk="0" hangingPunct="1">
       <a:defRPr sz="1200" kern="1200">
         <a:solidFill>
           <a:schemeClr val="tx1"/>
@@ -447,7 +241,7 @@
         <a:cs typeface="+mn-cs"/>
       </a:defRPr>
     </a:lvl7pPr>
-    <a:lvl8pPr marL="3200400" algn="l" defTabSz="457200" rtl="0" eaLnBrk="1" latinLnBrk="0" hangingPunct="1">
+    <a:lvl8pPr marL="3200400" algn="l" defTabSz="914400" rtl="0" eaLnBrk="1" latinLnBrk="0" hangingPunct="1">
       <a:defRPr sz="1200" kern="1200">
         <a:solidFill>
           <a:schemeClr val="tx1"/>
@@ -457,7 +251,7 @@
         <a:cs typeface="+mn-cs"/>
       </a:defRPr>
     </a:lvl8pPr>
-    <a:lvl9pPr marL="3657600" algn="l" defTabSz="457200" rtl="0" eaLnBrk="1" latinLnBrk="0" hangingPunct="1">
+    <a:lvl9pPr marL="3657600" algn="l" defTabSz="914400" rtl="0" eaLnBrk="1" latinLnBrk="0" hangingPunct="1">
       <a:defRPr sz="1200" kern="1200">
         <a:solidFill>
           <a:schemeClr val="tx1"/>
@@ -472,7 +266,7 @@
 </file>
 
 <file path=ppt/notesSlides/notesSlide1.xml><?xml version="1.0" encoding="utf-8"?>
-<p:notes xmlns:a="http://schemas.openxmlformats.org/drawingml/2006/main" xmlns:p="http://schemas.openxmlformats.org/presentationml/2006/main" xmlns:r="http://schemas.openxmlformats.org/officeDocument/2006/relationships">
+<p:notes xmlns:a="http://schemas.openxmlformats.org/drawingml/2006/main" xmlns:r="http://schemas.openxmlformats.org/officeDocument/2006/relationships" xmlns:p="http://schemas.openxmlformats.org/presentationml/2006/main">
   <p:cSld>
     <p:spTree>
       <p:nvGrpSpPr>
@@ -492,7 +286,7 @@
         <p:nvSpPr>
           <p:cNvPr id="2" name="Slide Image Placeholder 1"/>
           <p:cNvSpPr>
-            <a:spLocks noGrp="1"/>
+            <a:spLocks noGrp="1" noRot="1" noChangeAspect="1"/>
           </p:cNvSpPr>
           <p:nvPr>
             <p:ph type="sldImg" idx="2"/>
@@ -507,7 +301,7 @@
             <a:spLocks noGrp="1"/>
           </p:cNvSpPr>
           <p:nvPr>
-            <p:ph type="body" idx="3" sz="quarter"/>
+            <p:ph type="body" sz="quarter" idx="3"/>
           </p:nvPr>
         </p:nvSpPr>
         <p:spPr/>
@@ -519,13 +313,17 @@
               <a:t>0:00–0:35  ·  1 · Title</a:t>
             </a:r>
           </a:p>
-          <a:p/>
+          <a:p>
+            <a:endParaRPr/>
+          </a:p>
           <a:p>
             <a:r>
               <a:t>DO: Deck on the projector. Catalog open at localhost:3000. Studio logged in on a second screen.</a:t>
             </a:r>
           </a:p>
-          <a:p/>
+          <a:p>
+            <a:endParaRPr/>
+          </a:p>
           <a:p>
             <a:r>
               <a:t>SAY:</a:t>
@@ -545,7 +343,7 @@
             <a:spLocks noGrp="1"/>
           </p:cNvSpPr>
           <p:nvPr>
-            <p:ph type="sldNum" idx="5" sz="quarter"/>
+            <p:ph type="sldNum" sz="quarter" idx="5"/>
           </p:nvPr>
         </p:nvSpPr>
         <p:spPr/>
@@ -559,7 +357,7 @@
 </file>
 
 <file path=ppt/notesSlides/notesSlide10.xml><?xml version="1.0" encoding="utf-8"?>
-<p:notes xmlns:a="http://schemas.openxmlformats.org/drawingml/2006/main" xmlns:p="http://schemas.openxmlformats.org/presentationml/2006/main" xmlns:r="http://schemas.openxmlformats.org/officeDocument/2006/relationships">
+<p:notes xmlns:a="http://schemas.openxmlformats.org/drawingml/2006/main" xmlns:r="http://schemas.openxmlformats.org/officeDocument/2006/relationships" xmlns:p="http://schemas.openxmlformats.org/presentationml/2006/main">
   <p:cSld>
     <p:spTree>
       <p:nvGrpSpPr>
@@ -579,7 +377,7 @@
         <p:nvSpPr>
           <p:cNvPr id="2" name="Slide Image Placeholder 1"/>
           <p:cNvSpPr>
-            <a:spLocks noGrp="1"/>
+            <a:spLocks noGrp="1" noRot="1" noChangeAspect="1"/>
           </p:cNvSpPr>
           <p:nvPr>
             <p:ph type="sldImg" idx="2"/>
@@ -594,7 +392,7 @@
             <a:spLocks noGrp="1"/>
           </p:cNvSpPr>
           <p:nvPr>
-            <p:ph type="body" idx="3" sz="quarter"/>
+            <p:ph type="body" sz="quarter" idx="3"/>
           </p:nvPr>
         </p:nvSpPr>
         <p:spPr/>
@@ -606,13 +404,17 @@
               <a:t>8:50–9:05  ·  10 · NDA map</a:t>
             </a:r>
           </a:p>
-          <a:p/>
+          <a:p>
+            <a:endParaRPr/>
+          </a:p>
           <a:p>
             <a:r>
               <a:t>DO: Point at both public homepages. Do not open Studio. Then Jamb, then Slingshot.</a:t>
             </a:r>
           </a:p>
-          <a:p/>
+          <a:p>
+            <a:endParaRPr/>
+          </a:p>
           <a:p>
             <a:r>
               <a:t>SAY:</a:t>
@@ -632,7 +434,7 @@
             <a:spLocks noGrp="1"/>
           </p:cNvSpPr>
           <p:nvPr>
-            <p:ph type="sldNum" idx="5" sz="quarter"/>
+            <p:ph type="sldNum" sz="quarter" idx="5"/>
           </p:nvPr>
         </p:nvSpPr>
         <p:spPr/>
@@ -646,7 +448,7 @@
 </file>
 
 <file path=ppt/notesSlides/notesSlide11.xml><?xml version="1.0" encoding="utf-8"?>
-<p:notes xmlns:a="http://schemas.openxmlformats.org/drawingml/2006/main" xmlns:p="http://schemas.openxmlformats.org/presentationml/2006/main" xmlns:r="http://schemas.openxmlformats.org/officeDocument/2006/relationships">
+<p:notes xmlns:a="http://schemas.openxmlformats.org/drawingml/2006/main" xmlns:r="http://schemas.openxmlformats.org/officeDocument/2006/relationships" xmlns:p="http://schemas.openxmlformats.org/presentationml/2006/main">
   <p:cSld>
     <p:spTree>
       <p:nvGrpSpPr>
@@ -666,7 +468,7 @@
         <p:nvSpPr>
           <p:cNvPr id="2" name="Slide Image Placeholder 1"/>
           <p:cNvSpPr>
-            <a:spLocks noGrp="1"/>
+            <a:spLocks noGrp="1" noRot="1" noChangeAspect="1"/>
           </p:cNvSpPr>
           <p:nvPr>
             <p:ph type="sldImg" idx="2"/>
@@ -681,7 +483,7 @@
             <a:spLocks noGrp="1"/>
           </p:cNvSpPr>
           <p:nvPr>
-            <p:ph type="body" idx="3" sz="quarter"/>
+            <p:ph type="body" sz="quarter" idx="3"/>
           </p:nvPr>
         </p:nvSpPr>
         <p:spPr/>
@@ -693,13 +495,17 @@
               <a:t>9:05–9:40  ·  11 · Jamb business</a:t>
             </a:r>
           </a:p>
-          <a:p/>
+          <a:p>
+            <a:endParaRPr/>
+          </a:p>
           <a:p>
             <a:r>
               <a:t>DO: Walk who, inventory, sale. Screenshot is the public homepage. No Studio.</a:t>
             </a:r>
           </a:p>
-          <a:p/>
+          <a:p>
+            <a:endParaRPr/>
+          </a:p>
           <a:p>
             <a:r>
               <a:t>SAY:</a:t>
@@ -719,7 +525,7 @@
             <a:spLocks noGrp="1"/>
           </p:cNvSpPr>
           <p:nvPr>
-            <p:ph type="sldNum" idx="5" sz="quarter"/>
+            <p:ph type="sldNum" sz="quarter" idx="5"/>
           </p:nvPr>
         </p:nvSpPr>
         <p:spPr/>
@@ -733,7 +539,7 @@
 </file>
 
 <file path=ppt/notesSlides/notesSlide12.xml><?xml version="1.0" encoding="utf-8"?>
-<p:notes xmlns:a="http://schemas.openxmlformats.org/drawingml/2006/main" xmlns:p="http://schemas.openxmlformats.org/presentationml/2006/main" xmlns:r="http://schemas.openxmlformats.org/officeDocument/2006/relationships">
+<p:notes xmlns:a="http://schemas.openxmlformats.org/drawingml/2006/main" xmlns:r="http://schemas.openxmlformats.org/officeDocument/2006/relationships" xmlns:p="http://schemas.openxmlformats.org/presentationml/2006/main">
   <p:cSld>
     <p:spTree>
       <p:nvGrpSpPr>
@@ -753,7 +559,7 @@
         <p:nvSpPr>
           <p:cNvPr id="2" name="Slide Image Placeholder 1"/>
           <p:cNvSpPr>
-            <a:spLocks noGrp="1"/>
+            <a:spLocks noGrp="1" noRot="1" noChangeAspect="1"/>
           </p:cNvSpPr>
           <p:nvPr>
             <p:ph type="sldImg" idx="2"/>
@@ -768,7 +574,7 @@
             <a:spLocks noGrp="1"/>
           </p:cNvSpPr>
           <p:nvPr>
-            <p:ph type="body" idx="3" sz="quarter"/>
+            <p:ph type="body" sz="quarter" idx="3"/>
           </p:nvPr>
         </p:nvSpPr>
         <p:spPr/>
@@ -780,13 +586,17 @@
               <a:t>9:40–10:10  ·  12 · Jamb catalog</a:t>
             </a:r>
           </a:p>
-          <a:p/>
+          <a:p>
+            <a:endParaRPr/>
+          </a:p>
           <a:p>
             <a:r>
               <a:t>DO: Name the four public collections. Do not invent schemas.</a:t>
             </a:r>
           </a:p>
-          <a:p/>
+          <a:p>
+            <a:endParaRPr/>
+          </a:p>
           <a:p>
             <a:r>
               <a:t>SAY:</a:t>
@@ -806,7 +616,7 @@
             <a:spLocks noGrp="1"/>
           </p:cNvSpPr>
           <p:nvPr>
-            <p:ph type="sldNum" idx="5" sz="quarter"/>
+            <p:ph type="sldNum" sz="quarter" idx="5"/>
           </p:nvPr>
         </p:nvSpPr>
         <p:spPr/>
@@ -820,7 +630,7 @@
 </file>
 
 <file path=ppt/notesSlides/notesSlide13.xml><?xml version="1.0" encoding="utf-8"?>
-<p:notes xmlns:a="http://schemas.openxmlformats.org/drawingml/2006/main" xmlns:p="http://schemas.openxmlformats.org/presentationml/2006/main" xmlns:r="http://schemas.openxmlformats.org/officeDocument/2006/relationships">
+<p:notes xmlns:a="http://schemas.openxmlformats.org/drawingml/2006/main" xmlns:r="http://schemas.openxmlformats.org/officeDocument/2006/relationships" xmlns:p="http://schemas.openxmlformats.org/presentationml/2006/main">
   <p:cSld>
     <p:spTree>
       <p:nvGrpSpPr>
@@ -840,7 +650,7 @@
         <p:nvSpPr>
           <p:cNvPr id="2" name="Slide Image Placeholder 1"/>
           <p:cNvSpPr>
-            <a:spLocks noGrp="1"/>
+            <a:spLocks noGrp="1" noRot="1" noChangeAspect="1"/>
           </p:cNvSpPr>
           <p:nvPr>
             <p:ph type="sldImg" idx="2"/>
@@ -855,7 +665,7 @@
             <a:spLocks noGrp="1"/>
           </p:cNvSpPr>
           <p:nvPr>
-            <p:ph type="body" idx="3" sz="quarter"/>
+            <p:ph type="body" sz="quarter" idx="3"/>
           </p:nvPr>
         </p:nvSpPr>
         <p:spPr/>
@@ -867,13 +677,17 @@
               <a:t>10:10–10:45  ·  13 · Slingshot business</a:t>
             </a:r>
           </a:p>
-          <a:p/>
+          <a:p>
+            <a:endParaRPr/>
+          </a:p>
           <a:p>
             <a:r>
               <a:t>DO: Walk the problem, then the product, then who pays. Screenshot is How Mimics Work. No Studio.</a:t>
             </a:r>
           </a:p>
-          <a:p/>
+          <a:p>
+            <a:endParaRPr/>
+          </a:p>
           <a:p>
             <a:r>
               <a:t>SAY:</a:t>
@@ -893,7 +707,7 @@
             <a:spLocks noGrp="1"/>
           </p:cNvSpPr>
           <p:nvPr>
-            <p:ph type="sldNum" idx="5" sz="quarter"/>
+            <p:ph type="sldNum" sz="quarter" idx="5"/>
           </p:nvPr>
         </p:nvSpPr>
         <p:spPr/>
@@ -907,7 +721,7 @@
 </file>
 
 <file path=ppt/notesSlides/notesSlide14.xml><?xml version="1.0" encoding="utf-8"?>
-<p:notes xmlns:a="http://schemas.openxmlformats.org/drawingml/2006/main" xmlns:p="http://schemas.openxmlformats.org/presentationml/2006/main" xmlns:r="http://schemas.openxmlformats.org/officeDocument/2006/relationships">
+<p:notes xmlns:a="http://schemas.openxmlformats.org/drawingml/2006/main" xmlns:r="http://schemas.openxmlformats.org/officeDocument/2006/relationships" xmlns:p="http://schemas.openxmlformats.org/presentationml/2006/main">
   <p:cSld>
     <p:spTree>
       <p:nvGrpSpPr>
@@ -927,7 +741,7 @@
         <p:nvSpPr>
           <p:cNvPr id="2" name="Slide Image Placeholder 1"/>
           <p:cNvSpPr>
-            <a:spLocks noGrp="1"/>
+            <a:spLocks noGrp="1" noRot="1" noChangeAspect="1"/>
           </p:cNvSpPr>
           <p:nvPr>
             <p:ph type="sldImg" idx="2"/>
@@ -942,7 +756,7 @@
             <a:spLocks noGrp="1"/>
           </p:cNvSpPr>
           <p:nvPr>
-            <p:ph type="body" idx="3" sz="quarter"/>
+            <p:ph type="body" sz="quarter" idx="3"/>
           </p:nvPr>
         </p:nvSpPr>
         <p:spPr/>
@@ -954,13 +768,17 @@
               <a:t>10:45–11:15  ·  14 · Slingshot catalog</a:t>
             </a:r>
           </a:p>
-          <a:p/>
+          <a:p>
+            <a:endParaRPr/>
+          </a:p>
           <a:p>
             <a:r>
               <a:t>DO: Home, how it works, shop. Name public surfaces only.</a:t>
             </a:r>
           </a:p>
-          <a:p/>
+          <a:p>
+            <a:endParaRPr/>
+          </a:p>
           <a:p>
             <a:r>
               <a:t>SAY:</a:t>
@@ -980,7 +798,7 @@
             <a:spLocks noGrp="1"/>
           </p:cNvSpPr>
           <p:nvPr>
-            <p:ph type="sldNum" idx="5" sz="quarter"/>
+            <p:ph type="sldNum" sz="quarter" idx="5"/>
           </p:nvPr>
         </p:nvSpPr>
         <p:spPr/>
@@ -994,7 +812,7 @@
 </file>
 
 <file path=ppt/notesSlides/notesSlide15.xml><?xml version="1.0" encoding="utf-8"?>
-<p:notes xmlns:a="http://schemas.openxmlformats.org/drawingml/2006/main" xmlns:p="http://schemas.openxmlformats.org/presentationml/2006/main" xmlns:r="http://schemas.openxmlformats.org/officeDocument/2006/relationships">
+<p:notes xmlns:a="http://schemas.openxmlformats.org/drawingml/2006/main" xmlns:r="http://schemas.openxmlformats.org/officeDocument/2006/relationships" xmlns:p="http://schemas.openxmlformats.org/presentationml/2006/main">
   <p:cSld>
     <p:spTree>
       <p:nvGrpSpPr>
@@ -1014,7 +832,7 @@
         <p:nvSpPr>
           <p:cNvPr id="2" name="Slide Image Placeholder 1"/>
           <p:cNvSpPr>
-            <a:spLocks noGrp="1"/>
+            <a:spLocks noGrp="1" noRot="1" noChangeAspect="1"/>
           </p:cNvSpPr>
           <p:nvPr>
             <p:ph type="sldImg" idx="2"/>
@@ -1029,7 +847,7 @@
             <a:spLocks noGrp="1"/>
           </p:cNvSpPr>
           <p:nvPr>
-            <p:ph type="body" idx="3" sz="quarter"/>
+            <p:ph type="body" sz="quarter" idx="3"/>
           </p:nvPr>
         </p:nvSpPr>
         <p:spPr/>
@@ -1041,13 +859,17 @@
               <a:t>11:15–11:30  ·  15 · Stop</a:t>
             </a:r>
           </a:p>
-          <a:p/>
+          <a:p>
+            <a:endParaRPr/>
+          </a:p>
           <a:p>
             <a:r>
               <a:t>DO: Stop. Invite questions on Thorn and Furrow, not on those studios.</a:t>
             </a:r>
           </a:p>
-          <a:p/>
+          <a:p>
+            <a:endParaRPr/>
+          </a:p>
           <a:p>
             <a:r>
               <a:t>SAY:</a:t>
@@ -1067,7 +889,7 @@
             <a:spLocks noGrp="1"/>
           </p:cNvSpPr>
           <p:nvPr>
-            <p:ph type="sldNum" idx="5" sz="quarter"/>
+            <p:ph type="sldNum" sz="quarter" idx="5"/>
           </p:nvPr>
         </p:nvSpPr>
         <p:spPr/>
@@ -1081,7 +903,7 @@
 </file>
 
 <file path=ppt/notesSlides/notesSlide2.xml><?xml version="1.0" encoding="utf-8"?>
-<p:notes xmlns:a="http://schemas.openxmlformats.org/drawingml/2006/main" xmlns:p="http://schemas.openxmlformats.org/presentationml/2006/main" xmlns:r="http://schemas.openxmlformats.org/officeDocument/2006/relationships">
+<p:notes xmlns:a="http://schemas.openxmlformats.org/drawingml/2006/main" xmlns:r="http://schemas.openxmlformats.org/officeDocument/2006/relationships" xmlns:p="http://schemas.openxmlformats.org/presentationml/2006/main">
   <p:cSld>
     <p:spTree>
       <p:nvGrpSpPr>
@@ -1101,7 +923,7 @@
         <p:nvSpPr>
           <p:cNvPr id="2" name="Slide Image Placeholder 1"/>
           <p:cNvSpPr>
-            <a:spLocks noGrp="1"/>
+            <a:spLocks noGrp="1" noRot="1" noChangeAspect="1"/>
           </p:cNvSpPr>
           <p:nvPr>
             <p:ph type="sldImg" idx="2"/>
@@ -1116,7 +938,7 @@
             <a:spLocks noGrp="1"/>
           </p:cNvSpPr>
           <p:nvPr>
-            <p:ph type="body" idx="3" sz="quarter"/>
+            <p:ph type="body" sz="quarter" idx="3"/>
           </p:nvPr>
         </p:nvSpPr>
         <p:spPr/>
@@ -1128,13 +950,17 @@
               <a:t>0:35–1:20  ·  2 · The job</a:t>
             </a:r>
           </a:p>
-          <a:p/>
+          <a:p>
+            <a:endParaRPr/>
+          </a:p>
           <a:p>
             <a:r>
               <a:t>DO: Stay on the pitch slide. Do not click the site yet.</a:t>
             </a:r>
           </a:p>
-          <a:p/>
+          <a:p>
+            <a:endParaRPr/>
+          </a:p>
           <a:p>
             <a:r>
               <a:t>SAY:</a:t>
@@ -1154,7 +980,7 @@
             <a:spLocks noGrp="1"/>
           </p:cNvSpPr>
           <p:nvPr>
-            <p:ph type="sldNum" idx="5" sz="quarter"/>
+            <p:ph type="sldNum" sz="quarter" idx="5"/>
           </p:nvPr>
         </p:nvSpPr>
         <p:spPr/>
@@ -1168,7 +994,7 @@
 </file>
 
 <file path=ppt/notesSlides/notesSlide3.xml><?xml version="1.0" encoding="utf-8"?>
-<p:notes xmlns:a="http://schemas.openxmlformats.org/drawingml/2006/main" xmlns:p="http://schemas.openxmlformats.org/presentationml/2006/main" xmlns:r="http://schemas.openxmlformats.org/officeDocument/2006/relationships">
+<p:notes xmlns:a="http://schemas.openxmlformats.org/drawingml/2006/main" xmlns:r="http://schemas.openxmlformats.org/officeDocument/2006/relationships" xmlns:p="http://schemas.openxmlformats.org/presentationml/2006/main">
   <p:cSld>
     <p:spTree>
       <p:nvGrpSpPr>
@@ -1188,7 +1014,7 @@
         <p:nvSpPr>
           <p:cNvPr id="2" name="Slide Image Placeholder 1"/>
           <p:cNvSpPr>
-            <a:spLocks noGrp="1"/>
+            <a:spLocks noGrp="1" noRot="1" noChangeAspect="1"/>
           </p:cNvSpPr>
           <p:nvPr>
             <p:ph type="sldImg" idx="2"/>
@@ -1203,7 +1029,7 @@
             <a:spLocks noGrp="1"/>
           </p:cNvSpPr>
           <p:nvPr>
-            <p:ph type="body" idx="3" sz="quarter"/>
+            <p:ph type="body" sz="quarter" idx="3"/>
           </p:nvPr>
         </p:nvSpPr>
         <p:spPr/>
@@ -1215,13 +1041,17 @@
               <a:t>1:20–2:05  ·  3 · What visitors see</a:t>
             </a:r>
           </a:p>
-          <a:p/>
+          <a:p>
+            <a:endParaRPr/>
+          </a:p>
           <a:p>
             <a:r>
               <a:t>DO: Point at the four cards, then glance at the live homepage if it is visible.</a:t>
             </a:r>
           </a:p>
-          <a:p/>
+          <a:p>
+            <a:endParaRPr/>
+          </a:p>
           <a:p>
             <a:r>
               <a:t>SAY:</a:t>
@@ -1241,7 +1071,7 @@
             <a:spLocks noGrp="1"/>
           </p:cNvSpPr>
           <p:nvPr>
-            <p:ph type="sldNum" idx="5" sz="quarter"/>
+            <p:ph type="sldNum" sz="quarter" idx="5"/>
           </p:nvPr>
         </p:nvSpPr>
         <p:spPr/>
@@ -1255,7 +1085,7 @@
 </file>
 
 <file path=ppt/notesSlides/notesSlide4.xml><?xml version="1.0" encoding="utf-8"?>
-<p:notes xmlns:a="http://schemas.openxmlformats.org/drawingml/2006/main" xmlns:p="http://schemas.openxmlformats.org/presentationml/2006/main" xmlns:r="http://schemas.openxmlformats.org/officeDocument/2006/relationships">
+<p:notes xmlns:a="http://schemas.openxmlformats.org/drawingml/2006/main" xmlns:r="http://schemas.openxmlformats.org/officeDocument/2006/relationships" xmlns:p="http://schemas.openxmlformats.org/presentationml/2006/main">
   <p:cSld>
     <p:spTree>
       <p:nvGrpSpPr>
@@ -1275,7 +1105,7 @@
         <p:nvSpPr>
           <p:cNvPr id="2" name="Slide Image Placeholder 1"/>
           <p:cNvSpPr>
-            <a:spLocks noGrp="1"/>
+            <a:spLocks noGrp="1" noRot="1" noChangeAspect="1"/>
           </p:cNvSpPr>
           <p:nvPr>
             <p:ph type="sldImg" idx="2"/>
@@ -1290,7 +1120,7 @@
             <a:spLocks noGrp="1"/>
           </p:cNvSpPr>
           <p:nvPr>
-            <p:ph type="body" idx="3" sz="quarter"/>
+            <p:ph type="body" sz="quarter" idx="3"/>
           </p:nvPr>
         </p:nvSpPr>
         <p:spPr/>
@@ -1302,7 +1132,9 @@
               <a:t>2:05–2:50  ·  4 · Why this shape</a:t>
             </a:r>
           </a:p>
-          <a:p/>
+          <a:p>
+            <a:endParaRPr/>
+          </a:p>
           <a:p>
             <a:r>
               <a:t>SAY:</a:t>
@@ -1322,7 +1154,7 @@
             <a:spLocks noGrp="1"/>
           </p:cNvSpPr>
           <p:nvPr>
-            <p:ph type="sldNum" idx="5" sz="quarter"/>
+            <p:ph type="sldNum" sz="quarter" idx="5"/>
           </p:nvPr>
         </p:nvSpPr>
         <p:spPr/>
@@ -1336,7 +1168,7 @@
 </file>
 
 <file path=ppt/notesSlides/notesSlide5.xml><?xml version="1.0" encoding="utf-8"?>
-<p:notes xmlns:a="http://schemas.openxmlformats.org/drawingml/2006/main" xmlns:p="http://schemas.openxmlformats.org/presentationml/2006/main" xmlns:r="http://schemas.openxmlformats.org/officeDocument/2006/relationships">
+<p:notes xmlns:a="http://schemas.openxmlformats.org/drawingml/2006/main" xmlns:r="http://schemas.openxmlformats.org/officeDocument/2006/relationships" xmlns:p="http://schemas.openxmlformats.org/presentationml/2006/main">
   <p:cSld>
     <p:spTree>
       <p:nvGrpSpPr>
@@ -1356,7 +1188,7 @@
         <p:nvSpPr>
           <p:cNvPr id="2" name="Slide Image Placeholder 1"/>
           <p:cNvSpPr>
-            <a:spLocks noGrp="1"/>
+            <a:spLocks noGrp="1" noRot="1" noChangeAspect="1"/>
           </p:cNvSpPr>
           <p:nvPr>
             <p:ph type="sldImg" idx="2"/>
@@ -1371,7 +1203,7 @@
             <a:spLocks noGrp="1"/>
           </p:cNvSpPr>
           <p:nvPr>
-            <p:ph type="body" idx="3" sz="quarter"/>
+            <p:ph type="body" sz="quarter" idx="3"/>
           </p:nvPr>
         </p:nvSpPr>
         <p:spPr/>
@@ -1383,13 +1215,17 @@
               <a:t>2:50–3:50  ·  5 · Architecture</a:t>
             </a:r>
           </a:p>
-          <a:p/>
+          <a:p>
+            <a:endParaRPr/>
+          </a:p>
           <a:p>
             <a:r>
               <a:t>DO: Walk the five boxes left to right. Do not open code unless asked.</a:t>
             </a:r>
           </a:p>
-          <a:p/>
+          <a:p>
+            <a:endParaRPr/>
+          </a:p>
           <a:p>
             <a:r>
               <a:t>SAY:</a:t>
@@ -1409,7 +1245,7 @@
             <a:spLocks noGrp="1"/>
           </p:cNvSpPr>
           <p:nvPr>
-            <p:ph type="sldNum" idx="5" sz="quarter"/>
+            <p:ph type="sldNum" sz="quarter" idx="5"/>
           </p:nvPr>
         </p:nvSpPr>
         <p:spPr/>
@@ -1423,7 +1259,7 @@
 </file>
 
 <file path=ppt/notesSlides/notesSlide6.xml><?xml version="1.0" encoding="utf-8"?>
-<p:notes xmlns:a="http://schemas.openxmlformats.org/drawingml/2006/main" xmlns:p="http://schemas.openxmlformats.org/presentationml/2006/main" xmlns:r="http://schemas.openxmlformats.org/officeDocument/2006/relationships">
+<p:notes xmlns:a="http://schemas.openxmlformats.org/drawingml/2006/main" xmlns:r="http://schemas.openxmlformats.org/officeDocument/2006/relationships" xmlns:p="http://schemas.openxmlformats.org/presentationml/2006/main">
   <p:cSld>
     <p:spTree>
       <p:nvGrpSpPr>
@@ -1443,7 +1279,7 @@
         <p:nvSpPr>
           <p:cNvPr id="2" name="Slide Image Placeholder 1"/>
           <p:cNvSpPr>
-            <a:spLocks noGrp="1"/>
+            <a:spLocks noGrp="1" noRot="1" noChangeAspect="1"/>
           </p:cNvSpPr>
           <p:nvPr>
             <p:ph type="sldImg" idx="2"/>
@@ -1458,7 +1294,7 @@
             <a:spLocks noGrp="1"/>
           </p:cNvSpPr>
           <p:nvPr>
-            <p:ph type="body" idx="3" sz="quarter"/>
+            <p:ph type="body" sz="quarter" idx="3"/>
           </p:nvPr>
         </p:nvSpPr>
         <p:spPr/>
@@ -1470,13 +1306,17 @@
               <a:t>3:50–4:35  ·  6 · Content model</a:t>
             </a:r>
           </a:p>
-          <a:p/>
+          <a:p>
+            <a:endParaRPr/>
+          </a:p>
           <a:p>
             <a:r>
               <a:t>DO: Name the five documents. Mention the Studio desk is labeled The farm.</a:t>
             </a:r>
           </a:p>
-          <a:p/>
+          <a:p>
+            <a:endParaRPr/>
+          </a:p>
           <a:p>
             <a:r>
               <a:t>SAY:</a:t>
@@ -1496,7 +1336,7 @@
             <a:spLocks noGrp="1"/>
           </p:cNvSpPr>
           <p:nvPr>
-            <p:ph type="sldNum" idx="5" sz="quarter"/>
+            <p:ph type="sldNum" sz="quarter" idx="5"/>
           </p:nvPr>
         </p:nvSpPr>
         <p:spPr/>
@@ -1510,7 +1350,7 @@
 </file>
 
 <file path=ppt/notesSlides/notesSlide7.xml><?xml version="1.0" encoding="utf-8"?>
-<p:notes xmlns:a="http://schemas.openxmlformats.org/drawingml/2006/main" xmlns:p="http://schemas.openxmlformats.org/presentationml/2006/main" xmlns:r="http://schemas.openxmlformats.org/officeDocument/2006/relationships">
+<p:notes xmlns:a="http://schemas.openxmlformats.org/drawingml/2006/main" xmlns:r="http://schemas.openxmlformats.org/officeDocument/2006/relationships" xmlns:p="http://schemas.openxmlformats.org/presentationml/2006/main">
   <p:cSld>
     <p:spTree>
       <p:nvGrpSpPr>
@@ -1530,7 +1370,7 @@
         <p:nvSpPr>
           <p:cNvPr id="2" name="Slide Image Placeholder 1"/>
           <p:cNvSpPr>
-            <a:spLocks noGrp="1"/>
+            <a:spLocks noGrp="1" noRot="1" noChangeAspect="1"/>
           </p:cNvSpPr>
           <p:nvPr>
             <p:ph type="sldImg" idx="2"/>
@@ -1545,7 +1385,7 @@
             <a:spLocks noGrp="1"/>
           </p:cNvSpPr>
           <p:nvPr>
-            <p:ph type="body" idx="3" sz="quarter"/>
+            <p:ph type="body" sz="quarter" idx="3"/>
           </p:nvPr>
         </p:nvSpPr>
         <p:spPr/>
@@ -1557,13 +1397,17 @@
               <a:t>4:35–7:30  ·  7 · Live demo</a:t>
             </a:r>
           </a:p>
-          <a:p/>
+          <a:p>
+            <a:endParaRPr/>
+          </a:p>
           <a:p>
             <a:r>
               <a:t>DO: Switch to the browser. (1) Homepage: masthead, Icehouse feature, sowing table, packet grid. (2) Click Icehouse Tomato. (3) Studio → Catalog homepage → masthead heading → Publish → reload /. (4) Hover Request a packet list and say the event ID.</a:t>
             </a:r>
           </a:p>
-          <a:p/>
+          <a:p>
+            <a:endParaRPr/>
+          </a:p>
           <a:p>
             <a:r>
               <a:t>SAY:</a:t>
@@ -1583,7 +1427,7 @@
             <a:spLocks noGrp="1"/>
           </p:cNvSpPr>
           <p:nvPr>
-            <p:ph type="sldNum" idx="5" sz="quarter"/>
+            <p:ph type="sldNum" sz="quarter" idx="5"/>
           </p:nvPr>
         </p:nvSpPr>
         <p:spPr/>
@@ -1597,7 +1441,7 @@
 </file>
 
 <file path=ppt/notesSlides/notesSlide8.xml><?xml version="1.0" encoding="utf-8"?>
-<p:notes xmlns:a="http://schemas.openxmlformats.org/drawingml/2006/main" xmlns:p="http://schemas.openxmlformats.org/presentationml/2006/main" xmlns:r="http://schemas.openxmlformats.org/officeDocument/2006/relationships">
+<p:notes xmlns:a="http://schemas.openxmlformats.org/drawingml/2006/main" xmlns:r="http://schemas.openxmlformats.org/officeDocument/2006/relationships" xmlns:p="http://schemas.openxmlformats.org/presentationml/2006/main">
   <p:cSld>
     <p:spTree>
       <p:nvGrpSpPr>
@@ -1617,7 +1461,7 @@
         <p:nvSpPr>
           <p:cNvPr id="2" name="Slide Image Placeholder 1"/>
           <p:cNvSpPr>
-            <a:spLocks noGrp="1"/>
+            <a:spLocks noGrp="1" noRot="1" noChangeAspect="1"/>
           </p:cNvSpPr>
           <p:nvPr>
             <p:ph type="sldImg" idx="2"/>
@@ -1632,7 +1476,7 @@
             <a:spLocks noGrp="1"/>
           </p:cNvSpPr>
           <p:nvPr>
-            <p:ph type="body" idx="3" sz="quarter"/>
+            <p:ph type="body" sz="quarter" idx="3"/>
           </p:nvPr>
         </p:nvSpPr>
         <p:spPr/>
@@ -1644,13 +1488,17 @@
               <a:t>7:30–8:20  ·  8 · What I would defend</a:t>
             </a:r>
           </a:p>
-          <a:p/>
+          <a:p>
+            <a:endParaRPr/>
+          </a:p>
           <a:p>
             <a:r>
               <a:t>DO: Back to the deck. If Studio failed, say: seed fallback still rendered the catalog.</a:t>
             </a:r>
           </a:p>
-          <a:p/>
+          <a:p>
+            <a:endParaRPr/>
+          </a:p>
           <a:p>
             <a:r>
               <a:t>SAY:</a:t>
@@ -1670,7 +1518,7 @@
             <a:spLocks noGrp="1"/>
           </p:cNvSpPr>
           <p:nvPr>
-            <p:ph type="sldNum" idx="5" sz="quarter"/>
+            <p:ph type="sldNum" sz="quarter" idx="5"/>
           </p:nvPr>
         </p:nvSpPr>
         <p:spPr/>
@@ -1684,7 +1532,7 @@
 </file>
 
 <file path=ppt/notesSlides/notesSlide9.xml><?xml version="1.0" encoding="utf-8"?>
-<p:notes xmlns:a="http://schemas.openxmlformats.org/drawingml/2006/main" xmlns:p="http://schemas.openxmlformats.org/presentationml/2006/main" xmlns:r="http://schemas.openxmlformats.org/officeDocument/2006/relationships">
+<p:notes xmlns:a="http://schemas.openxmlformats.org/drawingml/2006/main" xmlns:r="http://schemas.openxmlformats.org/officeDocument/2006/relationships" xmlns:p="http://schemas.openxmlformats.org/presentationml/2006/main">
   <p:cSld>
     <p:spTree>
       <p:nvGrpSpPr>
@@ -1704,7 +1552,7 @@
         <p:nvSpPr>
           <p:cNvPr id="2" name="Slide Image Placeholder 1"/>
           <p:cNvSpPr>
-            <a:spLocks noGrp="1"/>
+            <a:spLocks noGrp="1" noRot="1" noChangeAspect="1"/>
           </p:cNvSpPr>
           <p:nvPr>
             <p:ph type="sldImg" idx="2"/>
@@ -1719,7 +1567,7 @@
             <a:spLocks noGrp="1"/>
           </p:cNvSpPr>
           <p:nvPr>
-            <p:ph type="body" idx="3" sz="quarter"/>
+            <p:ph type="body" sz="quarter" idx="3"/>
           </p:nvPr>
         </p:nvSpPr>
         <p:spPr/>
@@ -1731,13 +1579,17 @@
               <a:t>8:20–8:50  ·  9 · Close</a:t>
             </a:r>
           </a:p>
-          <a:p/>
+          <a:p>
+            <a:endParaRPr/>
+          </a:p>
           <a:p>
             <a:r>
               <a:t>DO: One line. If they only have ten minutes, stop and take questions. Otherwise go to slide 10.</a:t>
             </a:r>
           </a:p>
-          <a:p/>
+          <a:p>
+            <a:endParaRPr/>
+          </a:p>
           <a:p>
             <a:r>
               <a:t>SAY:</a:t>
@@ -1757,7 +1609,7 @@
             <a:spLocks noGrp="1"/>
           </p:cNvSpPr>
           <p:nvPr>
-            <p:ph type="sldNum" idx="5" sz="quarter"/>
+            <p:ph type="sldNum" sz="quarter" idx="5"/>
           </p:nvPr>
         </p:nvSpPr>
         <p:spPr/>
@@ -1808,10 +1660,9 @@
           <a:lstStyle/>
           <a:p>
             <a:r>
-              <a:rPr lang="en-US" smtClean="0"/>
+              <a:rPr lang="en-US"/>
               <a:t>Click to edit Master title style</a:t>
             </a:r>
-            <a:endParaRPr lang="en-US"/>
           </a:p>
         </p:txBody>
       </p:sp>
@@ -1927,10 +1778,9 @@
           </a:lstStyle>
           <a:p>
             <a:r>
-              <a:rPr lang="en-US" smtClean="0"/>
+              <a:rPr lang="en-US"/>
               <a:t>Click to edit Master subtitle style</a:t>
             </a:r>
-            <a:endParaRPr lang="en-US"/>
           </a:p>
         </p:txBody>
       </p:sp>
@@ -1951,7 +1801,7 @@
           <a:p>
             <a:fld id="{5BCAD085-E8A6-8845-BD4E-CB4CCA059FC4}" type="datetimeFigureOut">
               <a:rPr lang="en-US" smtClean="0"/>
-              <a:t>1/27/13</a:t>
+              <a:t>8/27/2026</a:t>
             </a:fld>
             <a:endParaRPr lang="en-US"/>
           </a:p>
@@ -2045,10 +1895,9 @@
           <a:lstStyle/>
           <a:p>
             <a:r>
-              <a:rPr lang="en-US" smtClean="0"/>
+              <a:rPr lang="en-US"/>
               <a:t>Click to edit Master title style</a:t>
             </a:r>
-            <a:endParaRPr lang="en-US"/>
           </a:p>
         </p:txBody>
       </p:sp>
@@ -2069,38 +1918,37 @@
           <a:p>
             <a:pPr lvl="0"/>
             <a:r>
-              <a:rPr lang="en-US" smtClean="0"/>
+              <a:rPr lang="en-US"/>
               <a:t>Click to edit Master text styles</a:t>
             </a:r>
           </a:p>
           <a:p>
             <a:pPr lvl="1"/>
             <a:r>
-              <a:rPr lang="en-US" smtClean="0"/>
+              <a:rPr lang="en-US"/>
               <a:t>Second level</a:t>
             </a:r>
           </a:p>
           <a:p>
             <a:pPr lvl="2"/>
             <a:r>
-              <a:rPr lang="en-US" smtClean="0"/>
+              <a:rPr lang="en-US"/>
               <a:t>Third level</a:t>
             </a:r>
           </a:p>
           <a:p>
             <a:pPr lvl="3"/>
             <a:r>
-              <a:rPr lang="en-US" smtClean="0"/>
+              <a:rPr lang="en-US"/>
               <a:t>Fourth level</a:t>
             </a:r>
           </a:p>
           <a:p>
             <a:pPr lvl="4"/>
             <a:r>
-              <a:rPr lang="en-US" smtClean="0"/>
+              <a:rPr lang="en-US"/>
               <a:t>Fifth level</a:t>
             </a:r>
-            <a:endParaRPr lang="en-US"/>
           </a:p>
         </p:txBody>
       </p:sp>
@@ -2121,7 +1969,7 @@
           <a:p>
             <a:fld id="{5BCAD085-E8A6-8845-BD4E-CB4CCA059FC4}" type="datetimeFigureOut">
               <a:rPr lang="en-US" smtClean="0"/>
-              <a:t>1/27/13</a:t>
+              <a:t>8/27/2026</a:t>
             </a:fld>
             <a:endParaRPr lang="en-US"/>
           </a:p>
@@ -2220,10 +2068,9 @@
           <a:lstStyle/>
           <a:p>
             <a:r>
-              <a:rPr lang="en-US" smtClean="0"/>
+              <a:rPr lang="en-US"/>
               <a:t>Click to edit Master title style</a:t>
             </a:r>
-            <a:endParaRPr lang="en-US"/>
           </a:p>
         </p:txBody>
       </p:sp>
@@ -2249,38 +2096,37 @@
           <a:p>
             <a:pPr lvl="0"/>
             <a:r>
-              <a:rPr lang="en-US" smtClean="0"/>
+              <a:rPr lang="en-US"/>
               <a:t>Click to edit Master text styles</a:t>
             </a:r>
           </a:p>
           <a:p>
             <a:pPr lvl="1"/>
             <a:r>
-              <a:rPr lang="en-US" smtClean="0"/>
+              <a:rPr lang="en-US"/>
               <a:t>Second level</a:t>
             </a:r>
           </a:p>
           <a:p>
             <a:pPr lvl="2"/>
             <a:r>
-              <a:rPr lang="en-US" smtClean="0"/>
+              <a:rPr lang="en-US"/>
               <a:t>Third level</a:t>
             </a:r>
           </a:p>
           <a:p>
             <a:pPr lvl="3"/>
             <a:r>
-              <a:rPr lang="en-US" smtClean="0"/>
+              <a:rPr lang="en-US"/>
               <a:t>Fourth level</a:t>
             </a:r>
           </a:p>
           <a:p>
             <a:pPr lvl="4"/>
             <a:r>
-              <a:rPr lang="en-US" smtClean="0"/>
+              <a:rPr lang="en-US"/>
               <a:t>Fifth level</a:t>
             </a:r>
-            <a:endParaRPr lang="en-US"/>
           </a:p>
         </p:txBody>
       </p:sp>
@@ -2301,7 +2147,7 @@
           <a:p>
             <a:fld id="{5BCAD085-E8A6-8845-BD4E-CB4CCA059FC4}" type="datetimeFigureOut">
               <a:rPr lang="en-US" smtClean="0"/>
-              <a:t>1/27/13</a:t>
+              <a:t>8/27/2026</a:t>
             </a:fld>
             <a:endParaRPr lang="en-US"/>
           </a:p>
@@ -2395,10 +2241,9 @@
           <a:lstStyle/>
           <a:p>
             <a:r>
-              <a:rPr lang="en-US" smtClean="0"/>
+              <a:rPr lang="en-US"/>
               <a:t>Click to edit Master title style</a:t>
             </a:r>
-            <a:endParaRPr lang="en-US"/>
           </a:p>
         </p:txBody>
       </p:sp>
@@ -2419,38 +2264,37 @@
           <a:p>
             <a:pPr lvl="0"/>
             <a:r>
-              <a:rPr lang="en-US" smtClean="0"/>
+              <a:rPr lang="en-US"/>
               <a:t>Click to edit Master text styles</a:t>
             </a:r>
           </a:p>
           <a:p>
             <a:pPr lvl="1"/>
             <a:r>
-              <a:rPr lang="en-US" smtClean="0"/>
+              <a:rPr lang="en-US"/>
               <a:t>Second level</a:t>
             </a:r>
           </a:p>
           <a:p>
             <a:pPr lvl="2"/>
             <a:r>
-              <a:rPr lang="en-US" smtClean="0"/>
+              <a:rPr lang="en-US"/>
               <a:t>Third level</a:t>
             </a:r>
           </a:p>
           <a:p>
             <a:pPr lvl="3"/>
             <a:r>
-              <a:rPr lang="en-US" smtClean="0"/>
+              <a:rPr lang="en-US"/>
               <a:t>Fourth level</a:t>
             </a:r>
           </a:p>
           <a:p>
             <a:pPr lvl="4"/>
             <a:r>
-              <a:rPr lang="en-US" smtClean="0"/>
+              <a:rPr lang="en-US"/>
               <a:t>Fifth level</a:t>
             </a:r>
-            <a:endParaRPr lang="en-US"/>
           </a:p>
         </p:txBody>
       </p:sp>
@@ -2471,7 +2315,7 @@
           <a:p>
             <a:fld id="{5BCAD085-E8A6-8845-BD4E-CB4CCA059FC4}" type="datetimeFigureOut">
               <a:rPr lang="en-US" smtClean="0"/>
-              <a:t>1/27/13</a:t>
+              <a:t>8/27/2026</a:t>
             </a:fld>
             <a:endParaRPr lang="en-US"/>
           </a:p>
@@ -2574,10 +2418,9 @@
           </a:lstStyle>
           <a:p>
             <a:r>
-              <a:rPr lang="en-US" smtClean="0"/>
+              <a:rPr lang="en-US"/>
               <a:t>Click to edit Master title style</a:t>
             </a:r>
-            <a:endParaRPr lang="en-US"/>
           </a:p>
         </p:txBody>
       </p:sp>
@@ -2694,7 +2537,7 @@
           <a:p>
             <a:pPr lvl="0"/>
             <a:r>
-              <a:rPr lang="en-US" smtClean="0"/>
+              <a:rPr lang="en-US"/>
               <a:t>Click to edit Master text styles</a:t>
             </a:r>
           </a:p>
@@ -2717,7 +2560,7 @@
           <a:p>
             <a:fld id="{5BCAD085-E8A6-8845-BD4E-CB4CCA059FC4}" type="datetimeFigureOut">
               <a:rPr lang="en-US" smtClean="0"/>
-              <a:t>1/27/13</a:t>
+              <a:t>8/27/2026</a:t>
             </a:fld>
             <a:endParaRPr lang="en-US"/>
           </a:p>
@@ -2811,10 +2654,9 @@
           <a:lstStyle/>
           <a:p>
             <a:r>
-              <a:rPr lang="en-US" smtClean="0"/>
+              <a:rPr lang="en-US"/>
               <a:t>Click to edit Master title style</a:t>
             </a:r>
-            <a:endParaRPr lang="en-US"/>
           </a:p>
         </p:txBody>
       </p:sp>
@@ -2868,38 +2710,37 @@
           <a:p>
             <a:pPr lvl="0"/>
             <a:r>
-              <a:rPr lang="en-US" smtClean="0"/>
+              <a:rPr lang="en-US"/>
               <a:t>Click to edit Master text styles</a:t>
             </a:r>
           </a:p>
           <a:p>
             <a:pPr lvl="1"/>
             <a:r>
-              <a:rPr lang="en-US" smtClean="0"/>
+              <a:rPr lang="en-US"/>
               <a:t>Second level</a:t>
             </a:r>
           </a:p>
           <a:p>
             <a:pPr lvl="2"/>
             <a:r>
-              <a:rPr lang="en-US" smtClean="0"/>
+              <a:rPr lang="en-US"/>
               <a:t>Third level</a:t>
             </a:r>
           </a:p>
           <a:p>
             <a:pPr lvl="3"/>
             <a:r>
-              <a:rPr lang="en-US" smtClean="0"/>
+              <a:rPr lang="en-US"/>
               <a:t>Fourth level</a:t>
             </a:r>
           </a:p>
           <a:p>
             <a:pPr lvl="4"/>
             <a:r>
-              <a:rPr lang="en-US" smtClean="0"/>
+              <a:rPr lang="en-US"/>
               <a:t>Fifth level</a:t>
             </a:r>
-            <a:endParaRPr lang="en-US"/>
           </a:p>
         </p:txBody>
       </p:sp>
@@ -2953,38 +2794,37 @@
           <a:p>
             <a:pPr lvl="0"/>
             <a:r>
-              <a:rPr lang="en-US" smtClean="0"/>
+              <a:rPr lang="en-US"/>
               <a:t>Click to edit Master text styles</a:t>
             </a:r>
           </a:p>
           <a:p>
             <a:pPr lvl="1"/>
             <a:r>
-              <a:rPr lang="en-US" smtClean="0"/>
+              <a:rPr lang="en-US"/>
               <a:t>Second level</a:t>
             </a:r>
           </a:p>
           <a:p>
             <a:pPr lvl="2"/>
             <a:r>
-              <a:rPr lang="en-US" smtClean="0"/>
+              <a:rPr lang="en-US"/>
               <a:t>Third level</a:t>
             </a:r>
           </a:p>
           <a:p>
             <a:pPr lvl="3"/>
             <a:r>
-              <a:rPr lang="en-US" smtClean="0"/>
+              <a:rPr lang="en-US"/>
               <a:t>Fourth level</a:t>
             </a:r>
           </a:p>
           <a:p>
             <a:pPr lvl="4"/>
             <a:r>
-              <a:rPr lang="en-US" smtClean="0"/>
+              <a:rPr lang="en-US"/>
               <a:t>Fifth level</a:t>
             </a:r>
-            <a:endParaRPr lang="en-US"/>
           </a:p>
         </p:txBody>
       </p:sp>
@@ -3005,7 +2845,7 @@
           <a:p>
             <a:fld id="{5BCAD085-E8A6-8845-BD4E-CB4CCA059FC4}" type="datetimeFigureOut">
               <a:rPr lang="en-US" smtClean="0"/>
-              <a:t>1/27/13</a:t>
+              <a:t>8/27/2026</a:t>
             </a:fld>
             <a:endParaRPr lang="en-US"/>
           </a:p>
@@ -3103,10 +2943,9 @@
           </a:lstStyle>
           <a:p>
             <a:r>
-              <a:rPr lang="en-US" smtClean="0"/>
+              <a:rPr lang="en-US"/>
               <a:t>Click to edit Master title style</a:t>
             </a:r>
-            <a:endParaRPr lang="en-US"/>
           </a:p>
         </p:txBody>
       </p:sp>
@@ -3169,7 +3008,7 @@
           <a:p>
             <a:pPr lvl="0"/>
             <a:r>
-              <a:rPr lang="en-US" smtClean="0"/>
+              <a:rPr lang="en-US"/>
               <a:t>Click to edit Master text styles</a:t>
             </a:r>
           </a:p>
@@ -3225,38 +3064,37 @@
           <a:p>
             <a:pPr lvl="0"/>
             <a:r>
-              <a:rPr lang="en-US" smtClean="0"/>
+              <a:rPr lang="en-US"/>
               <a:t>Click to edit Master text styles</a:t>
             </a:r>
           </a:p>
           <a:p>
             <a:pPr lvl="1"/>
             <a:r>
-              <a:rPr lang="en-US" smtClean="0"/>
+              <a:rPr lang="en-US"/>
               <a:t>Second level</a:t>
             </a:r>
           </a:p>
           <a:p>
             <a:pPr lvl="2"/>
             <a:r>
-              <a:rPr lang="en-US" smtClean="0"/>
+              <a:rPr lang="en-US"/>
               <a:t>Third level</a:t>
             </a:r>
           </a:p>
           <a:p>
             <a:pPr lvl="3"/>
             <a:r>
-              <a:rPr lang="en-US" smtClean="0"/>
+              <a:rPr lang="en-US"/>
               <a:t>Fourth level</a:t>
             </a:r>
           </a:p>
           <a:p>
             <a:pPr lvl="4"/>
             <a:r>
-              <a:rPr lang="en-US" smtClean="0"/>
+              <a:rPr lang="en-US"/>
               <a:t>Fifth level</a:t>
             </a:r>
-            <a:endParaRPr lang="en-US"/>
           </a:p>
         </p:txBody>
       </p:sp>
@@ -3319,7 +3157,7 @@
           <a:p>
             <a:pPr lvl="0"/>
             <a:r>
-              <a:rPr lang="en-US" smtClean="0"/>
+              <a:rPr lang="en-US"/>
               <a:t>Click to edit Master text styles</a:t>
             </a:r>
           </a:p>
@@ -3375,38 +3213,37 @@
           <a:p>
             <a:pPr lvl="0"/>
             <a:r>
-              <a:rPr lang="en-US" smtClean="0"/>
+              <a:rPr lang="en-US"/>
               <a:t>Click to edit Master text styles</a:t>
             </a:r>
           </a:p>
           <a:p>
             <a:pPr lvl="1"/>
             <a:r>
-              <a:rPr lang="en-US" smtClean="0"/>
+              <a:rPr lang="en-US"/>
               <a:t>Second level</a:t>
             </a:r>
           </a:p>
           <a:p>
             <a:pPr lvl="2"/>
             <a:r>
-              <a:rPr lang="en-US" smtClean="0"/>
+              <a:rPr lang="en-US"/>
               <a:t>Third level</a:t>
             </a:r>
           </a:p>
           <a:p>
             <a:pPr lvl="3"/>
             <a:r>
-              <a:rPr lang="en-US" smtClean="0"/>
+              <a:rPr lang="en-US"/>
               <a:t>Fourth level</a:t>
             </a:r>
           </a:p>
           <a:p>
             <a:pPr lvl="4"/>
             <a:r>
-              <a:rPr lang="en-US" smtClean="0"/>
+              <a:rPr lang="en-US"/>
               <a:t>Fifth level</a:t>
             </a:r>
-            <a:endParaRPr lang="en-US"/>
           </a:p>
         </p:txBody>
       </p:sp>
@@ -3427,7 +3264,7 @@
           <a:p>
             <a:fld id="{5BCAD085-E8A6-8845-BD4E-CB4CCA059FC4}" type="datetimeFigureOut">
               <a:rPr lang="en-US" smtClean="0"/>
-              <a:t>1/27/13</a:t>
+              <a:t>8/27/2026</a:t>
             </a:fld>
             <a:endParaRPr lang="en-US"/>
           </a:p>
@@ -3521,10 +3358,9 @@
           <a:lstStyle/>
           <a:p>
             <a:r>
-              <a:rPr lang="en-US" smtClean="0"/>
+              <a:rPr lang="en-US"/>
               <a:t>Click to edit Master title style</a:t>
             </a:r>
-            <a:endParaRPr lang="en-US"/>
           </a:p>
         </p:txBody>
       </p:sp>
@@ -3545,7 +3381,7 @@
           <a:p>
             <a:fld id="{5BCAD085-E8A6-8845-BD4E-CB4CCA059FC4}" type="datetimeFigureOut">
               <a:rPr lang="en-US" smtClean="0"/>
-              <a:t>1/27/13</a:t>
+              <a:t>8/27/2026</a:t>
             </a:fld>
             <a:endParaRPr lang="en-US"/>
           </a:p>
@@ -3640,7 +3476,7 @@
           <a:p>
             <a:fld id="{5BCAD085-E8A6-8845-BD4E-CB4CCA059FC4}" type="datetimeFigureOut">
               <a:rPr lang="en-US" smtClean="0"/>
-              <a:t>1/27/13</a:t>
+              <a:t>8/27/2026</a:t>
             </a:fld>
             <a:endParaRPr lang="en-US"/>
           </a:p>
@@ -3743,10 +3579,9 @@
           </a:lstStyle>
           <a:p>
             <a:r>
-              <a:rPr lang="en-US" smtClean="0"/>
+              <a:rPr lang="en-US"/>
               <a:t>Click to edit Master title style</a:t>
             </a:r>
-            <a:endParaRPr lang="en-US"/>
           </a:p>
         </p:txBody>
       </p:sp>
@@ -3800,38 +3635,37 @@
           <a:p>
             <a:pPr lvl="0"/>
             <a:r>
-              <a:rPr lang="en-US" smtClean="0"/>
+              <a:rPr lang="en-US"/>
               <a:t>Click to edit Master text styles</a:t>
             </a:r>
           </a:p>
           <a:p>
             <a:pPr lvl="1"/>
             <a:r>
-              <a:rPr lang="en-US" smtClean="0"/>
+              <a:rPr lang="en-US"/>
               <a:t>Second level</a:t>
             </a:r>
           </a:p>
           <a:p>
             <a:pPr lvl="2"/>
             <a:r>
-              <a:rPr lang="en-US" smtClean="0"/>
+              <a:rPr lang="en-US"/>
               <a:t>Third level</a:t>
             </a:r>
           </a:p>
           <a:p>
             <a:pPr lvl="3"/>
             <a:r>
-              <a:rPr lang="en-US" smtClean="0"/>
+              <a:rPr lang="en-US"/>
               <a:t>Fourth level</a:t>
             </a:r>
           </a:p>
           <a:p>
             <a:pPr lvl="4"/>
             <a:r>
-              <a:rPr lang="en-US" smtClean="0"/>
+              <a:rPr lang="en-US"/>
               <a:t>Fifth level</a:t>
             </a:r>
-            <a:endParaRPr lang="en-US"/>
           </a:p>
         </p:txBody>
       </p:sp>
@@ -3894,7 +3728,7 @@
           <a:p>
             <a:pPr lvl="0"/>
             <a:r>
-              <a:rPr lang="en-US" smtClean="0"/>
+              <a:rPr lang="en-US"/>
               <a:t>Click to edit Master text styles</a:t>
             </a:r>
           </a:p>
@@ -3917,7 +3751,7 @@
           <a:p>
             <a:fld id="{5BCAD085-E8A6-8845-BD4E-CB4CCA059FC4}" type="datetimeFigureOut">
               <a:rPr lang="en-US" smtClean="0"/>
-              <a:t>1/27/13</a:t>
+              <a:t>8/27/2026</a:t>
             </a:fld>
             <a:endParaRPr lang="en-US"/>
           </a:p>
@@ -4020,10 +3854,9 @@
           </a:lstStyle>
           <a:p>
             <a:r>
-              <a:rPr lang="en-US" smtClean="0"/>
+              <a:rPr lang="en-US"/>
               <a:t>Click to edit Master title style</a:t>
             </a:r>
-            <a:endParaRPr lang="en-US"/>
           </a:p>
         </p:txBody>
       </p:sp>
@@ -4147,7 +3980,7 @@
           <a:p>
             <a:pPr lvl="0"/>
             <a:r>
-              <a:rPr lang="en-US" smtClean="0"/>
+              <a:rPr lang="en-US"/>
               <a:t>Click to edit Master text styles</a:t>
             </a:r>
           </a:p>
@@ -4170,7 +4003,7 @@
           <a:p>
             <a:fld id="{5BCAD085-E8A6-8845-BD4E-CB4CCA059FC4}" type="datetimeFigureOut">
               <a:rPr lang="en-US" smtClean="0"/>
-              <a:t>1/27/13</a:t>
+              <a:t>8/27/2026</a:t>
             </a:fld>
             <a:endParaRPr lang="en-US"/>
           </a:p>
@@ -4279,10 +4112,9 @@
           <a:lstStyle/>
           <a:p>
             <a:r>
-              <a:rPr lang="en-US" smtClean="0"/>
+              <a:rPr lang="en-US"/>
               <a:t>Click to edit Master title style</a:t>
             </a:r>
-            <a:endParaRPr lang="en-US"/>
           </a:p>
         </p:txBody>
       </p:sp>
@@ -4313,38 +4145,37 @@
           <a:p>
             <a:pPr lvl="0"/>
             <a:r>
-              <a:rPr lang="en-US" smtClean="0"/>
+              <a:rPr lang="en-US"/>
               <a:t>Click to edit Master text styles</a:t>
             </a:r>
           </a:p>
           <a:p>
             <a:pPr lvl="1"/>
             <a:r>
-              <a:rPr lang="en-US" smtClean="0"/>
+              <a:rPr lang="en-US"/>
               <a:t>Second level</a:t>
             </a:r>
           </a:p>
           <a:p>
             <a:pPr lvl="2"/>
             <a:r>
-              <a:rPr lang="en-US" smtClean="0"/>
+              <a:rPr lang="en-US"/>
               <a:t>Third level</a:t>
             </a:r>
           </a:p>
           <a:p>
             <a:pPr lvl="3"/>
             <a:r>
-              <a:rPr lang="en-US" smtClean="0"/>
+              <a:rPr lang="en-US"/>
               <a:t>Fourth level</a:t>
             </a:r>
           </a:p>
           <a:p>
             <a:pPr lvl="4"/>
             <a:r>
-              <a:rPr lang="en-US" smtClean="0"/>
+              <a:rPr lang="en-US"/>
               <a:t>Fifth level</a:t>
             </a:r>
-            <a:endParaRPr lang="en-US"/>
           </a:p>
         </p:txBody>
       </p:sp>
@@ -4383,7 +4214,7 @@
           <a:p>
             <a:fld id="{5BCAD085-E8A6-8845-BD4E-CB4CCA059FC4}" type="datetimeFigureOut">
               <a:rPr lang="en-US" smtClean="0"/>
-              <a:t>1/27/13</a:t>
+              <a:t>8/27/2026</a:t>
             </a:fld>
             <a:endParaRPr lang="en-US"/>
           </a:p>
@@ -4742,7 +4573,7 @@
 </file>
 
 <file path=ppt/slides/slide1.xml><?xml version="1.0" encoding="utf-8"?>
-<p:sld xmlns:a="http://schemas.openxmlformats.org/drawingml/2006/main" xmlns:p="http://schemas.openxmlformats.org/presentationml/2006/main" xmlns:r="http://schemas.openxmlformats.org/officeDocument/2006/relationships">
+<p:sld xmlns:a="http://schemas.openxmlformats.org/drawingml/2006/main" xmlns:r="http://schemas.openxmlformats.org/officeDocument/2006/relationships" xmlns:p="http://schemas.openxmlformats.org/presentationml/2006/main">
   <p:cSld>
     <p:spTree>
       <p:nvGrpSpPr>
@@ -4750,7 +4581,14 @@
         <p:cNvGrpSpPr/>
         <p:nvPr/>
       </p:nvGrpSpPr>
-      <p:grpSpPr/>
+      <p:grpSpPr>
+        <a:xfrm>
+          <a:off x="0" y="0"/>
+          <a:ext cx="0" cy="0"/>
+          <a:chOff x="0" y="0"/>
+          <a:chExt cx="0" cy="0"/>
+        </a:xfrm>
+      </p:grpSpPr>
       <p:sp>
         <p:nvSpPr>
           <p:cNvPr id="2" name="Rectangle 1"/>
@@ -4791,6 +4629,7 @@
           <a:lstStyle/>
           <a:p>
             <a:pPr algn="ctr"/>
+            <a:endParaRPr/>
           </a:p>
         </p:txBody>
       </p:sp>
@@ -4803,7 +4642,7 @@
           <p:nvPr/>
         </p:nvPicPr>
         <p:blipFill>
-          <a:blip r:embed="rId2"/>
+          <a:blip r:embed="rId3"/>
           <a:stretch>
             <a:fillRect/>
           </a:stretch>
@@ -4858,6 +4697,7 @@
           <a:lstStyle/>
           <a:p>
             <a:pPr algn="ctr"/>
+            <a:endParaRPr/>
           </a:p>
         </p:txBody>
       </p:sp>
@@ -4901,6 +4741,7 @@
           <a:lstStyle/>
           <a:p>
             <a:pPr algn="ctr"/>
+            <a:endParaRPr/>
           </a:p>
         </p:txBody>
       </p:sp>
@@ -4944,6 +4785,7 @@
           <a:lstStyle/>
           <a:p>
             <a:pPr algn="ctr"/>
+            <a:endParaRPr/>
           </a:p>
         </p:txBody>
       </p:sp>
@@ -4975,7 +4817,7 @@
               </a:spcAft>
             </a:pPr>
             <a:r>
-              <a:rPr sz="9600" b="1">
+              <a:rPr sz="9600" b="1" dirty="0">
                 <a:solidFill>
                   <a:srgbClr val="2A3628"/>
                 </a:solidFill>
@@ -5028,45 +4870,11 @@
           <a:lstStyle/>
           <a:p>
             <a:pPr algn="ctr"/>
-          </a:p>
-        </p:txBody>
-      </p:sp>
-      <p:sp>
-        <p:nvSpPr>
-          <p:cNvPr id="9" name="TextBox 8"/>
-          <p:cNvSpPr txBox="1"/>
-          <p:nvPr/>
-        </p:nvSpPr>
-        <p:spPr>
-          <a:xfrm>
-            <a:off x="658368" y="1353312"/>
-            <a:ext cx="3794760" cy="256032"/>
-          </a:xfrm>
-          <a:prstGeom prst="rect">
-            <a:avLst/>
-          </a:prstGeom>
-          <a:noFill/>
-        </p:spPr>
-        <p:txBody>
-          <a:bodyPr wrap="square">
-            <a:spAutoFit/>
-          </a:bodyPr>
-          <a:lstStyle/>
-          <a:p>
-            <a:pPr algn="ctr">
-              <a:spcAft>
-                <a:spcPts val="0"/>
-              </a:spcAft>
-            </a:pPr>
-            <a:r>
-              <a:rPr sz="1000" b="1">
-                <a:solidFill>
-                  <a:srgbClr val="FFFFFF"/>
-                </a:solidFill>
-                <a:latin typeface="Calibri"/>
-              </a:rPr>
-              <a:t>TEN MINUTES  ·  THEN PAST WORK</a:t>
-            </a:r>
+            <a:r>
+              <a:rPr lang="en-US" dirty="0"/>
+              <a:t>Vanta - Presentation</a:t>
+            </a:r>
+            <a:endParaRPr dirty="0"/>
           </a:p>
         </p:txBody>
       </p:sp>
@@ -5137,7 +4945,7 @@
               </a:spcAft>
             </a:pPr>
             <a:r>
-              <a:rPr sz="2200" b="0">
+              <a:rPr sz="2200" b="0" dirty="0">
                 <a:solidFill>
                   <a:srgbClr val="D8D4CC"/>
                 </a:solidFill>
@@ -5153,7 +4961,7 @@
               </a:spcAft>
             </a:pPr>
             <a:r>
-              <a:rPr sz="2200" b="0">
+              <a:rPr sz="2200" b="0" dirty="0">
                 <a:solidFill>
                   <a:srgbClr val="D8D4CC"/>
                 </a:solidFill>
@@ -5243,6 +5051,7 @@
           <a:lstStyle/>
           <a:p>
             <a:pPr algn="ctr"/>
+            <a:endParaRPr/>
           </a:p>
         </p:txBody>
       </p:sp>
@@ -5294,7 +5103,7 @@
 </file>
 
 <file path=ppt/slides/slide10.xml><?xml version="1.0" encoding="utf-8"?>
-<p:sld xmlns:a="http://schemas.openxmlformats.org/drawingml/2006/main" xmlns:p="http://schemas.openxmlformats.org/presentationml/2006/main" xmlns:r="http://schemas.openxmlformats.org/officeDocument/2006/relationships">
+<p:sld xmlns:a="http://schemas.openxmlformats.org/drawingml/2006/main" xmlns:r="http://schemas.openxmlformats.org/officeDocument/2006/relationships" xmlns:p="http://schemas.openxmlformats.org/presentationml/2006/main">
   <p:cSld>
     <p:spTree>
       <p:nvGrpSpPr>
@@ -5302,7 +5111,14 @@
         <p:cNvGrpSpPr/>
         <p:nvPr/>
       </p:nvGrpSpPr>
-      <p:grpSpPr/>
+      <p:grpSpPr>
+        <a:xfrm>
+          <a:off x="0" y="0"/>
+          <a:ext cx="0" cy="0"/>
+          <a:chOff x="0" y="0"/>
+          <a:chExt cx="0" cy="0"/>
+        </a:xfrm>
+      </p:grpSpPr>
       <p:sp>
         <p:nvSpPr>
           <p:cNvPr id="2" name="Rectangle 1"/>
@@ -5343,6 +5159,7 @@
           <a:lstStyle/>
           <a:p>
             <a:pPr algn="ctr"/>
+            <a:endParaRPr/>
           </a:p>
         </p:txBody>
       </p:sp>
@@ -5386,6 +5203,7 @@
           <a:lstStyle/>
           <a:p>
             <a:pPr algn="ctr"/>
+            <a:endParaRPr/>
           </a:p>
         </p:txBody>
       </p:sp>
@@ -5429,6 +5247,7 @@
           <a:lstStyle/>
           <a:p>
             <a:pPr algn="ctr"/>
+            <a:endParaRPr/>
           </a:p>
         </p:txBody>
       </p:sp>
@@ -5511,6 +5330,7 @@
           <a:lstStyle/>
           <a:p>
             <a:pPr algn="ctr"/>
+            <a:endParaRPr/>
           </a:p>
         </p:txBody>
       </p:sp>
@@ -5554,6 +5374,7 @@
           <a:lstStyle/>
           <a:p>
             <a:pPr algn="ctr"/>
+            <a:endParaRPr/>
           </a:p>
         </p:txBody>
       </p:sp>
@@ -5718,6 +5539,7 @@
           <a:lstStyle/>
           <a:p>
             <a:pPr algn="ctr"/>
+            <a:endParaRPr/>
           </a:p>
         </p:txBody>
       </p:sp>
@@ -5804,6 +5626,7 @@
           <a:lstStyle/>
           <a:p>
             <a:pPr algn="ctr"/>
+            <a:endParaRPr/>
           </a:p>
         </p:txBody>
       </p:sp>
@@ -5847,6 +5670,7 @@
           <a:lstStyle/>
           <a:p>
             <a:pPr algn="ctr"/>
+            <a:endParaRPr/>
           </a:p>
         </p:txBody>
       </p:sp>
@@ -5890,6 +5714,7 @@
           <a:lstStyle/>
           <a:p>
             <a:pPr algn="ctr"/>
+            <a:endParaRPr/>
           </a:p>
         </p:txBody>
       </p:sp>
@@ -5933,6 +5758,7 @@
           <a:lstStyle/>
           <a:p>
             <a:pPr algn="ctr"/>
+            <a:endParaRPr/>
           </a:p>
         </p:txBody>
       </p:sp>
@@ -5976,6 +5802,7 @@
           <a:lstStyle/>
           <a:p>
             <a:pPr algn="ctr"/>
+            <a:endParaRPr/>
           </a:p>
         </p:txBody>
       </p:sp>
@@ -6027,7 +5854,7 @@
           <p:nvPr/>
         </p:nvPicPr>
         <p:blipFill>
-          <a:blip r:embed="rId2"/>
+          <a:blip r:embed="rId3"/>
           <a:stretch>
             <a:fillRect/>
           </a:stretch>
@@ -6141,6 +5968,7 @@
           <a:lstStyle/>
           <a:p>
             <a:pPr algn="ctr"/>
+            <a:endParaRPr/>
           </a:p>
         </p:txBody>
       </p:sp>
@@ -6227,6 +6055,7 @@
           <a:lstStyle/>
           <a:p>
             <a:pPr algn="ctr"/>
+            <a:endParaRPr/>
           </a:p>
         </p:txBody>
       </p:sp>
@@ -6270,6 +6099,7 @@
           <a:lstStyle/>
           <a:p>
             <a:pPr algn="ctr"/>
+            <a:endParaRPr/>
           </a:p>
         </p:txBody>
       </p:sp>
@@ -6313,6 +6143,7 @@
           <a:lstStyle/>
           <a:p>
             <a:pPr algn="ctr"/>
+            <a:endParaRPr/>
           </a:p>
         </p:txBody>
       </p:sp>
@@ -6356,6 +6187,7 @@
           <a:lstStyle/>
           <a:p>
             <a:pPr algn="ctr"/>
+            <a:endParaRPr/>
           </a:p>
         </p:txBody>
       </p:sp>
@@ -6399,6 +6231,7 @@
           <a:lstStyle/>
           <a:p>
             <a:pPr algn="ctr"/>
+            <a:endParaRPr/>
           </a:p>
         </p:txBody>
       </p:sp>
@@ -6450,7 +6283,7 @@
           <p:nvPr/>
         </p:nvPicPr>
         <p:blipFill>
-          <a:blip r:embed="rId3"/>
+          <a:blip r:embed="rId4"/>
           <a:stretch>
             <a:fillRect/>
           </a:stretch>
@@ -6529,7 +6362,7 @@
 </file>
 
 <file path=ppt/slides/slide11.xml><?xml version="1.0" encoding="utf-8"?>
-<p:sld xmlns:a="http://schemas.openxmlformats.org/drawingml/2006/main" xmlns:p="http://schemas.openxmlformats.org/presentationml/2006/main" xmlns:r="http://schemas.openxmlformats.org/officeDocument/2006/relationships">
+<p:sld xmlns:a="http://schemas.openxmlformats.org/drawingml/2006/main" xmlns:r="http://schemas.openxmlformats.org/officeDocument/2006/relationships" xmlns:p="http://schemas.openxmlformats.org/presentationml/2006/main">
   <p:cSld>
     <p:spTree>
       <p:nvGrpSpPr>
@@ -6537,7 +6370,14 @@
         <p:cNvGrpSpPr/>
         <p:nvPr/>
       </p:nvGrpSpPr>
-      <p:grpSpPr/>
+      <p:grpSpPr>
+        <a:xfrm>
+          <a:off x="0" y="0"/>
+          <a:ext cx="0" cy="0"/>
+          <a:chOff x="0" y="0"/>
+          <a:chExt cx="0" cy="0"/>
+        </a:xfrm>
+      </p:grpSpPr>
       <p:sp>
         <p:nvSpPr>
           <p:cNvPr id="2" name="Rectangle 1"/>
@@ -6578,6 +6418,7 @@
           <a:lstStyle/>
           <a:p>
             <a:pPr algn="ctr"/>
+            <a:endParaRPr/>
           </a:p>
         </p:txBody>
       </p:sp>
@@ -6621,6 +6462,7 @@
           <a:lstStyle/>
           <a:p>
             <a:pPr algn="ctr"/>
+            <a:endParaRPr/>
           </a:p>
         </p:txBody>
       </p:sp>
@@ -6664,6 +6506,7 @@
           <a:lstStyle/>
           <a:p>
             <a:pPr algn="ctr"/>
+            <a:endParaRPr/>
           </a:p>
         </p:txBody>
       </p:sp>
@@ -6746,6 +6589,7 @@
           <a:lstStyle/>
           <a:p>
             <a:pPr algn="ctr"/>
+            <a:endParaRPr/>
           </a:p>
         </p:txBody>
       </p:sp>
@@ -6789,6 +6633,7 @@
           <a:lstStyle/>
           <a:p>
             <a:pPr algn="ctr"/>
+            <a:endParaRPr/>
           </a:p>
         </p:txBody>
       </p:sp>
@@ -6914,6 +6759,7 @@
           <a:lstStyle/>
           <a:p>
             <a:pPr algn="ctr"/>
+            <a:endParaRPr/>
           </a:p>
         </p:txBody>
       </p:sp>
@@ -7039,6 +6885,7 @@
           <a:lstStyle/>
           <a:p>
             <a:pPr algn="ctr"/>
+            <a:endParaRPr/>
           </a:p>
         </p:txBody>
       </p:sp>
@@ -7164,6 +7011,7 @@
           <a:lstStyle/>
           <a:p>
             <a:pPr algn="ctr"/>
+            <a:endParaRPr/>
           </a:p>
         </p:txBody>
       </p:sp>
@@ -7289,6 +7137,7 @@
           <a:lstStyle/>
           <a:p>
             <a:pPr algn="ctr"/>
+            <a:endParaRPr/>
           </a:p>
         </p:txBody>
       </p:sp>
@@ -7453,6 +7302,7 @@
           <a:lstStyle/>
           <a:p>
             <a:pPr algn="ctr"/>
+            <a:endParaRPr/>
           </a:p>
         </p:txBody>
       </p:sp>
@@ -7496,6 +7346,7 @@
           <a:lstStyle/>
           <a:p>
             <a:pPr algn="ctr"/>
+            <a:endParaRPr/>
           </a:p>
         </p:txBody>
       </p:sp>
@@ -7539,6 +7390,7 @@
           <a:lstStyle/>
           <a:p>
             <a:pPr algn="ctr"/>
+            <a:endParaRPr/>
           </a:p>
         </p:txBody>
       </p:sp>
@@ -7582,6 +7434,7 @@
           <a:lstStyle/>
           <a:p>
             <a:pPr algn="ctr"/>
+            <a:endParaRPr/>
           </a:p>
         </p:txBody>
       </p:sp>
@@ -7625,6 +7478,7 @@
           <a:lstStyle/>
           <a:p>
             <a:pPr algn="ctr"/>
+            <a:endParaRPr/>
           </a:p>
         </p:txBody>
       </p:sp>
@@ -7676,7 +7530,7 @@
           <p:nvPr/>
         </p:nvPicPr>
         <p:blipFill>
-          <a:blip r:embed="rId2"/>
+          <a:blip r:embed="rId3"/>
           <a:stretch>
             <a:fillRect/>
           </a:stretch>
@@ -7700,7 +7554,7 @@
 </file>
 
 <file path=ppt/slides/slide12.xml><?xml version="1.0" encoding="utf-8"?>
-<p:sld xmlns:a="http://schemas.openxmlformats.org/drawingml/2006/main" xmlns:p="http://schemas.openxmlformats.org/presentationml/2006/main" xmlns:r="http://schemas.openxmlformats.org/officeDocument/2006/relationships">
+<p:sld xmlns:a="http://schemas.openxmlformats.org/drawingml/2006/main" xmlns:r="http://schemas.openxmlformats.org/officeDocument/2006/relationships" xmlns:p="http://schemas.openxmlformats.org/presentationml/2006/main">
   <p:cSld>
     <p:spTree>
       <p:nvGrpSpPr>
@@ -7708,7 +7562,14 @@
         <p:cNvGrpSpPr/>
         <p:nvPr/>
       </p:nvGrpSpPr>
-      <p:grpSpPr/>
+      <p:grpSpPr>
+        <a:xfrm>
+          <a:off x="0" y="0"/>
+          <a:ext cx="0" cy="0"/>
+          <a:chOff x="0" y="0"/>
+          <a:chExt cx="0" cy="0"/>
+        </a:xfrm>
+      </p:grpSpPr>
       <p:sp>
         <p:nvSpPr>
           <p:cNvPr id="2" name="Rectangle 1"/>
@@ -7749,6 +7610,7 @@
           <a:lstStyle/>
           <a:p>
             <a:pPr algn="ctr"/>
+            <a:endParaRPr/>
           </a:p>
         </p:txBody>
       </p:sp>
@@ -7792,6 +7654,7 @@
           <a:lstStyle/>
           <a:p>
             <a:pPr algn="ctr"/>
+            <a:endParaRPr/>
           </a:p>
         </p:txBody>
       </p:sp>
@@ -7835,6 +7698,7 @@
           <a:lstStyle/>
           <a:p>
             <a:pPr algn="ctr"/>
+            <a:endParaRPr/>
           </a:p>
         </p:txBody>
       </p:sp>
@@ -7917,6 +7781,7 @@
           <a:lstStyle/>
           <a:p>
             <a:pPr algn="ctr"/>
+            <a:endParaRPr/>
           </a:p>
         </p:txBody>
       </p:sp>
@@ -7960,6 +7825,7 @@
           <a:lstStyle/>
           <a:p>
             <a:pPr algn="ctr"/>
+            <a:endParaRPr/>
           </a:p>
         </p:txBody>
       </p:sp>
@@ -8241,6 +8107,7 @@
           <a:lstStyle/>
           <a:p>
             <a:pPr algn="ctr"/>
+            <a:endParaRPr/>
           </a:p>
         </p:txBody>
       </p:sp>
@@ -8253,7 +8120,7 @@
           <p:nvPr/>
         </p:nvPicPr>
         <p:blipFill>
-          <a:blip r:embed="rId2"/>
+          <a:blip r:embed="rId3"/>
           <a:stretch>
             <a:fillRect/>
           </a:stretch>
@@ -8468,6 +8335,7 @@
           <a:lstStyle/>
           <a:p>
             <a:pPr algn="ctr"/>
+            <a:endParaRPr/>
           </a:p>
         </p:txBody>
       </p:sp>
@@ -8480,7 +8348,7 @@
           <p:nvPr/>
         </p:nvPicPr>
         <p:blipFill>
-          <a:blip r:embed="rId3"/>
+          <a:blip r:embed="rId4"/>
           <a:stretch>
             <a:fillRect/>
           </a:stretch>
@@ -8695,6 +8563,7 @@
           <a:lstStyle/>
           <a:p>
             <a:pPr algn="ctr"/>
+            <a:endParaRPr/>
           </a:p>
         </p:txBody>
       </p:sp>
@@ -8707,7 +8576,7 @@
           <p:nvPr/>
         </p:nvPicPr>
         <p:blipFill>
-          <a:blip r:embed="rId4"/>
+          <a:blip r:embed="rId5"/>
           <a:stretch>
             <a:fillRect/>
           </a:stretch>
@@ -8922,6 +8791,7 @@
           <a:lstStyle/>
           <a:p>
             <a:pPr algn="ctr"/>
+            <a:endParaRPr/>
           </a:p>
         </p:txBody>
       </p:sp>
@@ -8934,7 +8804,7 @@
           <p:nvPr/>
         </p:nvPicPr>
         <p:blipFill>
-          <a:blip r:embed="rId5"/>
+          <a:blip r:embed="rId6"/>
           <a:stretch>
             <a:fillRect/>
           </a:stretch>
@@ -8997,7 +8867,7 @@
 </file>
 
 <file path=ppt/slides/slide13.xml><?xml version="1.0" encoding="utf-8"?>
-<p:sld xmlns:a="http://schemas.openxmlformats.org/drawingml/2006/main" xmlns:p="http://schemas.openxmlformats.org/presentationml/2006/main" xmlns:r="http://schemas.openxmlformats.org/officeDocument/2006/relationships">
+<p:sld xmlns:a="http://schemas.openxmlformats.org/drawingml/2006/main" xmlns:r="http://schemas.openxmlformats.org/officeDocument/2006/relationships" xmlns:p="http://schemas.openxmlformats.org/presentationml/2006/main">
   <p:cSld>
     <p:spTree>
       <p:nvGrpSpPr>
@@ -9005,7 +8875,14 @@
         <p:cNvGrpSpPr/>
         <p:nvPr/>
       </p:nvGrpSpPr>
-      <p:grpSpPr/>
+      <p:grpSpPr>
+        <a:xfrm>
+          <a:off x="0" y="0"/>
+          <a:ext cx="0" cy="0"/>
+          <a:chOff x="0" y="0"/>
+          <a:chExt cx="0" cy="0"/>
+        </a:xfrm>
+      </p:grpSpPr>
       <p:sp>
         <p:nvSpPr>
           <p:cNvPr id="2" name="Rectangle 1"/>
@@ -9046,6 +8923,7 @@
           <a:lstStyle/>
           <a:p>
             <a:pPr algn="ctr"/>
+            <a:endParaRPr/>
           </a:p>
         </p:txBody>
       </p:sp>
@@ -9089,6 +8967,7 @@
           <a:lstStyle/>
           <a:p>
             <a:pPr algn="ctr"/>
+            <a:endParaRPr/>
           </a:p>
         </p:txBody>
       </p:sp>
@@ -9132,6 +9011,7 @@
           <a:lstStyle/>
           <a:p>
             <a:pPr algn="ctr"/>
+            <a:endParaRPr/>
           </a:p>
         </p:txBody>
       </p:sp>
@@ -9214,6 +9094,7 @@
           <a:lstStyle/>
           <a:p>
             <a:pPr algn="ctr"/>
+            <a:endParaRPr/>
           </a:p>
         </p:txBody>
       </p:sp>
@@ -9257,6 +9138,7 @@
           <a:lstStyle/>
           <a:p>
             <a:pPr algn="ctr"/>
+            <a:endParaRPr/>
           </a:p>
         </p:txBody>
       </p:sp>
@@ -9382,6 +9264,7 @@
           <a:lstStyle/>
           <a:p>
             <a:pPr algn="ctr"/>
+            <a:endParaRPr/>
           </a:p>
         </p:txBody>
       </p:sp>
@@ -9507,6 +9390,7 @@
           <a:lstStyle/>
           <a:p>
             <a:pPr algn="ctr"/>
+            <a:endParaRPr/>
           </a:p>
         </p:txBody>
       </p:sp>
@@ -9632,6 +9516,7 @@
           <a:lstStyle/>
           <a:p>
             <a:pPr algn="ctr"/>
+            <a:endParaRPr/>
           </a:p>
         </p:txBody>
       </p:sp>
@@ -9757,6 +9642,7 @@
           <a:lstStyle/>
           <a:p>
             <a:pPr algn="ctr"/>
+            <a:endParaRPr/>
           </a:p>
         </p:txBody>
       </p:sp>
@@ -9921,6 +9807,7 @@
           <a:lstStyle/>
           <a:p>
             <a:pPr algn="ctr"/>
+            <a:endParaRPr/>
           </a:p>
         </p:txBody>
       </p:sp>
@@ -9964,6 +9851,7 @@
           <a:lstStyle/>
           <a:p>
             <a:pPr algn="ctr"/>
+            <a:endParaRPr/>
           </a:p>
         </p:txBody>
       </p:sp>
@@ -10007,6 +9895,7 @@
           <a:lstStyle/>
           <a:p>
             <a:pPr algn="ctr"/>
+            <a:endParaRPr/>
           </a:p>
         </p:txBody>
       </p:sp>
@@ -10050,6 +9939,7 @@
           <a:lstStyle/>
           <a:p>
             <a:pPr algn="ctr"/>
+            <a:endParaRPr/>
           </a:p>
         </p:txBody>
       </p:sp>
@@ -10093,6 +9983,7 @@
           <a:lstStyle/>
           <a:p>
             <a:pPr algn="ctr"/>
+            <a:endParaRPr/>
           </a:p>
         </p:txBody>
       </p:sp>
@@ -10144,7 +10035,7 @@
           <p:nvPr/>
         </p:nvPicPr>
         <p:blipFill>
-          <a:blip r:embed="rId2"/>
+          <a:blip r:embed="rId3"/>
           <a:stretch>
             <a:fillRect/>
           </a:stretch>
@@ -10168,7 +10059,7 @@
 </file>
 
 <file path=ppt/slides/slide14.xml><?xml version="1.0" encoding="utf-8"?>
-<p:sld xmlns:a="http://schemas.openxmlformats.org/drawingml/2006/main" xmlns:p="http://schemas.openxmlformats.org/presentationml/2006/main" xmlns:r="http://schemas.openxmlformats.org/officeDocument/2006/relationships">
+<p:sld xmlns:a="http://schemas.openxmlformats.org/drawingml/2006/main" xmlns:r="http://schemas.openxmlformats.org/officeDocument/2006/relationships" xmlns:p="http://schemas.openxmlformats.org/presentationml/2006/main">
   <p:cSld>
     <p:spTree>
       <p:nvGrpSpPr>
@@ -10176,7 +10067,14 @@
         <p:cNvGrpSpPr/>
         <p:nvPr/>
       </p:nvGrpSpPr>
-      <p:grpSpPr/>
+      <p:grpSpPr>
+        <a:xfrm>
+          <a:off x="0" y="0"/>
+          <a:ext cx="0" cy="0"/>
+          <a:chOff x="0" y="0"/>
+          <a:chExt cx="0" cy="0"/>
+        </a:xfrm>
+      </p:grpSpPr>
       <p:sp>
         <p:nvSpPr>
           <p:cNvPr id="2" name="Rectangle 1"/>
@@ -10217,6 +10115,7 @@
           <a:lstStyle/>
           <a:p>
             <a:pPr algn="ctr"/>
+            <a:endParaRPr/>
           </a:p>
         </p:txBody>
       </p:sp>
@@ -10260,6 +10159,7 @@
           <a:lstStyle/>
           <a:p>
             <a:pPr algn="ctr"/>
+            <a:endParaRPr/>
           </a:p>
         </p:txBody>
       </p:sp>
@@ -10303,6 +10203,7 @@
           <a:lstStyle/>
           <a:p>
             <a:pPr algn="ctr"/>
+            <a:endParaRPr/>
           </a:p>
         </p:txBody>
       </p:sp>
@@ -10385,6 +10286,7 @@
           <a:lstStyle/>
           <a:p>
             <a:pPr algn="ctr"/>
+            <a:endParaRPr/>
           </a:p>
         </p:txBody>
       </p:sp>
@@ -10428,6 +10330,7 @@
           <a:lstStyle/>
           <a:p>
             <a:pPr algn="ctr"/>
+            <a:endParaRPr/>
           </a:p>
         </p:txBody>
       </p:sp>
@@ -10670,6 +10573,7 @@
           <a:lstStyle/>
           <a:p>
             <a:pPr algn="ctr"/>
+            <a:endParaRPr/>
           </a:p>
         </p:txBody>
       </p:sp>
@@ -10682,7 +10586,7 @@
           <p:nvPr/>
         </p:nvPicPr>
         <p:blipFill>
-          <a:blip r:embed="rId2"/>
+          <a:blip r:embed="rId3"/>
           <a:stretch>
             <a:fillRect/>
           </a:stretch>
@@ -10858,6 +10762,7 @@
           <a:lstStyle/>
           <a:p>
             <a:pPr algn="ctr"/>
+            <a:endParaRPr/>
           </a:p>
         </p:txBody>
       </p:sp>
@@ -10870,7 +10775,7 @@
           <p:nvPr/>
         </p:nvPicPr>
         <p:blipFill>
-          <a:blip r:embed="rId3"/>
+          <a:blip r:embed="rId4"/>
           <a:stretch>
             <a:fillRect/>
           </a:stretch>
@@ -11046,6 +10951,7 @@
           <a:lstStyle/>
           <a:p>
             <a:pPr algn="ctr"/>
+            <a:endParaRPr/>
           </a:p>
         </p:txBody>
       </p:sp>
@@ -11058,7 +10964,7 @@
           <p:nvPr/>
         </p:nvPicPr>
         <p:blipFill>
-          <a:blip r:embed="rId4"/>
+          <a:blip r:embed="rId5"/>
           <a:stretch>
             <a:fillRect/>
           </a:stretch>
@@ -11121,7 +11027,7 @@
 </file>
 
 <file path=ppt/slides/slide15.xml><?xml version="1.0" encoding="utf-8"?>
-<p:sld xmlns:a="http://schemas.openxmlformats.org/drawingml/2006/main" xmlns:p="http://schemas.openxmlformats.org/presentationml/2006/main" xmlns:r="http://schemas.openxmlformats.org/officeDocument/2006/relationships">
+<p:sld xmlns:a="http://schemas.openxmlformats.org/drawingml/2006/main" xmlns:r="http://schemas.openxmlformats.org/officeDocument/2006/relationships" xmlns:p="http://schemas.openxmlformats.org/presentationml/2006/main">
   <p:cSld>
     <p:spTree>
       <p:nvGrpSpPr>
@@ -11129,7 +11035,14 @@
         <p:cNvGrpSpPr/>
         <p:nvPr/>
       </p:nvGrpSpPr>
-      <p:grpSpPr/>
+      <p:grpSpPr>
+        <a:xfrm>
+          <a:off x="0" y="0"/>
+          <a:ext cx="0" cy="0"/>
+          <a:chOff x="0" y="0"/>
+          <a:chExt cx="0" cy="0"/>
+        </a:xfrm>
+      </p:grpSpPr>
       <p:sp>
         <p:nvSpPr>
           <p:cNvPr id="2" name="Rectangle 1"/>
@@ -11170,6 +11083,7 @@
           <a:lstStyle/>
           <a:p>
             <a:pPr algn="ctr"/>
+            <a:endParaRPr/>
           </a:p>
         </p:txBody>
       </p:sp>
@@ -11213,6 +11127,7 @@
           <a:lstStyle/>
           <a:p>
             <a:pPr algn="ctr"/>
+            <a:endParaRPr/>
           </a:p>
         </p:txBody>
       </p:sp>
@@ -11256,6 +11171,7 @@
           <a:lstStyle/>
           <a:p>
             <a:pPr algn="ctr"/>
+            <a:endParaRPr/>
           </a:p>
         </p:txBody>
       </p:sp>
@@ -11393,6 +11309,7 @@
           <a:lstStyle/>
           <a:p>
             <a:pPr algn="ctr"/>
+            <a:endParaRPr/>
           </a:p>
         </p:txBody>
       </p:sp>
@@ -11522,7 +11439,7 @@
 </file>
 
 <file path=ppt/slides/slide2.xml><?xml version="1.0" encoding="utf-8"?>
-<p:sld xmlns:a="http://schemas.openxmlformats.org/drawingml/2006/main" xmlns:p="http://schemas.openxmlformats.org/presentationml/2006/main" xmlns:r="http://schemas.openxmlformats.org/officeDocument/2006/relationships">
+<p:sld xmlns:a="http://schemas.openxmlformats.org/drawingml/2006/main" xmlns:r="http://schemas.openxmlformats.org/officeDocument/2006/relationships" xmlns:p="http://schemas.openxmlformats.org/presentationml/2006/main">
   <p:cSld>
     <p:spTree>
       <p:nvGrpSpPr>
@@ -11530,7 +11447,14 @@
         <p:cNvGrpSpPr/>
         <p:nvPr/>
       </p:nvGrpSpPr>
-      <p:grpSpPr/>
+      <p:grpSpPr>
+        <a:xfrm>
+          <a:off x="0" y="0"/>
+          <a:ext cx="0" cy="0"/>
+          <a:chOff x="0" y="0"/>
+          <a:chExt cx="0" cy="0"/>
+        </a:xfrm>
+      </p:grpSpPr>
       <p:sp>
         <p:nvSpPr>
           <p:cNvPr id="2" name="Rectangle 1"/>
@@ -11571,6 +11495,7 @@
           <a:lstStyle/>
           <a:p>
             <a:pPr algn="ctr"/>
+            <a:endParaRPr/>
           </a:p>
         </p:txBody>
       </p:sp>
@@ -11614,6 +11539,7 @@
           <a:lstStyle/>
           <a:p>
             <a:pPr algn="ctr"/>
+            <a:endParaRPr/>
           </a:p>
         </p:txBody>
       </p:sp>
@@ -11657,6 +11583,7 @@
           <a:lstStyle/>
           <a:p>
             <a:pPr algn="ctr"/>
+            <a:endParaRPr/>
           </a:p>
         </p:txBody>
       </p:sp>
@@ -11739,6 +11666,7 @@
           <a:lstStyle/>
           <a:p>
             <a:pPr algn="ctr"/>
+            <a:endParaRPr/>
           </a:p>
         </p:txBody>
       </p:sp>
@@ -11782,6 +11710,7 @@
           <a:lstStyle/>
           <a:p>
             <a:pPr algn="ctr"/>
+            <a:endParaRPr/>
           </a:p>
         </p:txBody>
       </p:sp>
@@ -11906,15 +11835,12 @@
                 <a:spcPts val="600"/>
               </a:spcAft>
             </a:pPr>
-            <a:r>
-              <a:rPr sz="1400" b="0">
-                <a:solidFill>
-                  <a:srgbClr val="6B6560"/>
-                </a:solidFill>
-                <a:latin typeface="Calibri"/>
-              </a:rPr>
-              <a:t/>
-            </a:r>
+            <a:endParaRPr sz="1400" b="0">
+              <a:solidFill>
+                <a:srgbClr val="6B6560"/>
+              </a:solidFill>
+              <a:latin typeface="Calibri"/>
+            </a:endParaRPr>
           </a:p>
           <a:p>
             <a:pPr algn="l">
@@ -11978,6 +11904,7 @@
           <a:lstStyle/>
           <a:p>
             <a:pPr algn="ctr"/>
+            <a:endParaRPr/>
           </a:p>
         </p:txBody>
       </p:sp>
@@ -12021,6 +11948,7 @@
           <a:lstStyle/>
           <a:p>
             <a:pPr algn="ctr"/>
+            <a:endParaRPr/>
           </a:p>
         </p:txBody>
       </p:sp>
@@ -12146,6 +12074,7 @@
           <a:lstStyle/>
           <a:p>
             <a:pPr algn="ctr"/>
+            <a:endParaRPr/>
           </a:p>
         </p:txBody>
       </p:sp>
@@ -12189,6 +12118,7 @@
           <a:lstStyle/>
           <a:p>
             <a:pPr algn="ctr"/>
+            <a:endParaRPr/>
           </a:p>
         </p:txBody>
       </p:sp>
@@ -12314,6 +12244,7 @@
           <a:lstStyle/>
           <a:p>
             <a:pPr algn="ctr"/>
+            <a:endParaRPr/>
           </a:p>
         </p:txBody>
       </p:sp>
@@ -12357,6 +12288,7 @@
           <a:lstStyle/>
           <a:p>
             <a:pPr algn="ctr"/>
+            <a:endParaRPr/>
           </a:p>
         </p:txBody>
       </p:sp>
@@ -12482,6 +12414,7 @@
           <a:lstStyle/>
           <a:p>
             <a:pPr algn="ctr"/>
+            <a:endParaRPr/>
           </a:p>
         </p:txBody>
       </p:sp>
@@ -12525,6 +12458,7 @@
           <a:lstStyle/>
           <a:p>
             <a:pPr algn="ctr"/>
+            <a:endParaRPr/>
           </a:p>
         </p:txBody>
       </p:sp>
@@ -12568,6 +12502,7 @@
           <a:lstStyle/>
           <a:p>
             <a:pPr algn="ctr"/>
+            <a:endParaRPr/>
           </a:p>
         </p:txBody>
       </p:sp>
@@ -12611,6 +12546,7 @@
           <a:lstStyle/>
           <a:p>
             <a:pPr algn="ctr"/>
+            <a:endParaRPr/>
           </a:p>
         </p:txBody>
       </p:sp>
@@ -12654,6 +12590,7 @@
           <a:lstStyle/>
           <a:p>
             <a:pPr algn="ctr"/>
+            <a:endParaRPr/>
           </a:p>
         </p:txBody>
       </p:sp>
@@ -12666,7 +12603,7 @@
         <p:spPr>
           <a:xfrm>
             <a:off x="6400800" y="1335024"/>
-            <a:ext cx="4983480" cy="219456"/>
+            <a:ext cx="4983480" cy="246221"/>
           </a:xfrm>
           <a:prstGeom prst="rect">
             <a:avLst/>
@@ -12679,19 +12616,31 @@
           </a:bodyPr>
           <a:lstStyle/>
           <a:p>
-            <a:pPr algn="l">
-              <a:spcAft>
-                <a:spcPts val="0"/>
-              </a:spcAft>
-            </a:pPr>
-            <a:r>
-              <a:rPr sz="1000" b="0">
+            <a:r>
+              <a:rPr lang="en-US" sz="1000" dirty="0">
+                <a:solidFill>
+                  <a:srgbClr val="6B6560"/>
+                </a:solidFill>
+                <a:hlinkClick r:id="rId3"/>
+              </a:rPr>
+              <a:t>https://thornandfurrow-2ed4o5men-zenithzen22222-2223.vercel.app/</a:t>
+            </a:r>
+            <a:r>
+              <a:rPr lang="en-US" sz="1000" dirty="0">
+                <a:solidFill>
+                  <a:srgbClr val="6B6560"/>
+                </a:solidFill>
+              </a:rPr>
+              <a:t> </a:t>
+            </a:r>
+            <a:r>
+              <a:rPr sz="1000" b="0" dirty="0">
                 <a:solidFill>
                   <a:srgbClr val="6B6560"/>
                 </a:solidFill>
                 <a:latin typeface="Calibri"/>
               </a:rPr>
-              <a:t>localhost:3000  ·  live catalog</a:t>
+              <a:t>·  live catalog</a:t>
             </a:r>
           </a:p>
         </p:txBody>
@@ -12705,7 +12654,7 @@
           <p:nvPr/>
         </p:nvPicPr>
         <p:blipFill>
-          <a:blip r:embed="rId2"/>
+          <a:blip r:embed="rId4"/>
           <a:stretch>
             <a:fillRect/>
           </a:stretch>
@@ -12729,7 +12678,7 @@
 </file>
 
 <file path=ppt/slides/slide3.xml><?xml version="1.0" encoding="utf-8"?>
-<p:sld xmlns:a="http://schemas.openxmlformats.org/drawingml/2006/main" xmlns:p="http://schemas.openxmlformats.org/presentationml/2006/main" xmlns:r="http://schemas.openxmlformats.org/officeDocument/2006/relationships">
+<p:sld xmlns:a="http://schemas.openxmlformats.org/drawingml/2006/main" xmlns:r="http://schemas.openxmlformats.org/officeDocument/2006/relationships" xmlns:p="http://schemas.openxmlformats.org/presentationml/2006/main">
   <p:cSld>
     <p:spTree>
       <p:nvGrpSpPr>
@@ -12737,7 +12686,14 @@
         <p:cNvGrpSpPr/>
         <p:nvPr/>
       </p:nvGrpSpPr>
-      <p:grpSpPr/>
+      <p:grpSpPr>
+        <a:xfrm>
+          <a:off x="0" y="0"/>
+          <a:ext cx="0" cy="0"/>
+          <a:chOff x="0" y="0"/>
+          <a:chExt cx="0" cy="0"/>
+        </a:xfrm>
+      </p:grpSpPr>
       <p:sp>
         <p:nvSpPr>
           <p:cNvPr id="2" name="Rectangle 1"/>
@@ -12778,6 +12734,7 @@
           <a:lstStyle/>
           <a:p>
             <a:pPr algn="ctr"/>
+            <a:endParaRPr/>
           </a:p>
         </p:txBody>
       </p:sp>
@@ -12821,6 +12778,7 @@
           <a:lstStyle/>
           <a:p>
             <a:pPr algn="ctr"/>
+            <a:endParaRPr/>
           </a:p>
         </p:txBody>
       </p:sp>
@@ -12864,6 +12822,7 @@
           <a:lstStyle/>
           <a:p>
             <a:pPr algn="ctr"/>
+            <a:endParaRPr/>
           </a:p>
         </p:txBody>
       </p:sp>
@@ -12946,6 +12905,7 @@
           <a:lstStyle/>
           <a:p>
             <a:pPr algn="ctr"/>
+            <a:endParaRPr/>
           </a:p>
         </p:txBody>
       </p:sp>
@@ -12989,6 +12949,7 @@
           <a:lstStyle/>
           <a:p>
             <a:pPr algn="ctr"/>
+            <a:endParaRPr/>
           </a:p>
         </p:txBody>
       </p:sp>
@@ -13079,7 +13040,7 @@
         <p:spPr>
           <a:xfrm>
             <a:off x="658368" y="1261872"/>
-            <a:ext cx="10881360" cy="347472"/>
+            <a:ext cx="10881360" cy="292388"/>
           </a:xfrm>
           <a:prstGeom prst="rect">
             <a:avLst/>
@@ -13098,13 +13059,13 @@
               </a:spcAft>
             </a:pPr>
             <a:r>
-              <a:rPr sz="1300" b="0">
+              <a:rPr sz="1300" b="0" dirty="0">
                 <a:solidFill>
                   <a:srgbClr val="6B6560"/>
                 </a:solidFill>
                 <a:latin typeface="Calibri"/>
               </a:rPr>
-              <a:t>Four public surfaces. Studio lives at /studio and is not linked on the storefront — the catalog should feel live, not like a CMS demo.</a:t>
+              <a:t>Four public surfaces. Studio lives at /studio and is not linked on the storefront</a:t>
             </a:r>
           </a:p>
         </p:txBody>
@@ -13270,6 +13231,7 @@
           <a:lstStyle/>
           <a:p>
             <a:pPr algn="ctr"/>
+            <a:endParaRPr/>
           </a:p>
         </p:txBody>
       </p:sp>
@@ -13282,7 +13244,7 @@
           <p:nvPr/>
         </p:nvPicPr>
         <p:blipFill>
-          <a:blip r:embed="rId2"/>
+          <a:blip r:embed="rId3"/>
           <a:stretch>
             <a:fillRect/>
           </a:stretch>
@@ -13497,6 +13459,7 @@
           <a:lstStyle/>
           <a:p>
             <a:pPr algn="ctr"/>
+            <a:endParaRPr/>
           </a:p>
         </p:txBody>
       </p:sp>
@@ -13509,7 +13472,7 @@
           <p:nvPr/>
         </p:nvPicPr>
         <p:blipFill>
-          <a:blip r:embed="rId3"/>
+          <a:blip r:embed="rId4"/>
           <a:stretch>
             <a:fillRect/>
           </a:stretch>
@@ -13724,6 +13687,7 @@
           <a:lstStyle/>
           <a:p>
             <a:pPr algn="ctr"/>
+            <a:endParaRPr/>
           </a:p>
         </p:txBody>
       </p:sp>
@@ -13736,7 +13700,7 @@
           <p:nvPr/>
         </p:nvPicPr>
         <p:blipFill>
-          <a:blip r:embed="rId4"/>
+          <a:blip r:embed="rId5"/>
           <a:stretch>
             <a:fillRect/>
           </a:stretch>
@@ -13951,6 +13915,7 @@
           <a:lstStyle/>
           <a:p>
             <a:pPr algn="ctr"/>
+            <a:endParaRPr/>
           </a:p>
         </p:txBody>
       </p:sp>
@@ -13963,7 +13928,7 @@
           <p:nvPr/>
         </p:nvPicPr>
         <p:blipFill>
-          <a:blip r:embed="rId5"/>
+          <a:blip r:embed="rId6"/>
           <a:stretch>
             <a:fillRect/>
           </a:stretch>
@@ -14026,7 +13991,7 @@
 </file>
 
 <file path=ppt/slides/slide4.xml><?xml version="1.0" encoding="utf-8"?>
-<p:sld xmlns:a="http://schemas.openxmlformats.org/drawingml/2006/main" xmlns:p="http://schemas.openxmlformats.org/presentationml/2006/main" xmlns:r="http://schemas.openxmlformats.org/officeDocument/2006/relationships">
+<p:sld xmlns:a="http://schemas.openxmlformats.org/drawingml/2006/main" xmlns:r="http://schemas.openxmlformats.org/officeDocument/2006/relationships" xmlns:p="http://schemas.openxmlformats.org/presentationml/2006/main">
   <p:cSld>
     <p:spTree>
       <p:nvGrpSpPr>
@@ -14034,7 +13999,14 @@
         <p:cNvGrpSpPr/>
         <p:nvPr/>
       </p:nvGrpSpPr>
-      <p:grpSpPr/>
+      <p:grpSpPr>
+        <a:xfrm>
+          <a:off x="0" y="0"/>
+          <a:ext cx="0" cy="0"/>
+          <a:chOff x="0" y="0"/>
+          <a:chExt cx="0" cy="0"/>
+        </a:xfrm>
+      </p:grpSpPr>
       <p:sp>
         <p:nvSpPr>
           <p:cNvPr id="2" name="Rectangle 1"/>
@@ -14075,6 +14047,7 @@
           <a:lstStyle/>
           <a:p>
             <a:pPr algn="ctr"/>
+            <a:endParaRPr/>
           </a:p>
         </p:txBody>
       </p:sp>
@@ -14118,6 +14091,7 @@
           <a:lstStyle/>
           <a:p>
             <a:pPr algn="ctr"/>
+            <a:endParaRPr/>
           </a:p>
         </p:txBody>
       </p:sp>
@@ -14161,6 +14135,7 @@
           <a:lstStyle/>
           <a:p>
             <a:pPr algn="ctr"/>
+            <a:endParaRPr/>
           </a:p>
         </p:txBody>
       </p:sp>
@@ -14243,6 +14218,7 @@
           <a:lstStyle/>
           <a:p>
             <a:pPr algn="ctr"/>
+            <a:endParaRPr/>
           </a:p>
         </p:txBody>
       </p:sp>
@@ -14286,6 +14262,7 @@
           <a:lstStyle/>
           <a:p>
             <a:pPr algn="ctr"/>
+            <a:endParaRPr/>
           </a:p>
         </p:txBody>
       </p:sp>
@@ -14411,6 +14388,7 @@
           <a:lstStyle/>
           <a:p>
             <a:pPr algn="ctr"/>
+            <a:endParaRPr/>
           </a:p>
         </p:txBody>
       </p:sp>
@@ -14575,6 +14553,7 @@
           <a:lstStyle/>
           <a:p>
             <a:pPr algn="ctr"/>
+            <a:endParaRPr/>
           </a:p>
         </p:txBody>
       </p:sp>
@@ -14739,6 +14718,7 @@
           <a:lstStyle/>
           <a:p>
             <a:pPr algn="ctr"/>
+            <a:endParaRPr/>
           </a:p>
         </p:txBody>
       </p:sp>
@@ -14903,6 +14883,7 @@
           <a:lstStyle/>
           <a:p>
             <a:pPr algn="ctr"/>
+            <a:endParaRPr/>
           </a:p>
         </p:txBody>
       </p:sp>
@@ -15106,6 +15087,7 @@
           <a:lstStyle/>
           <a:p>
             <a:pPr algn="ctr"/>
+            <a:endParaRPr/>
           </a:p>
         </p:txBody>
       </p:sp>
@@ -15149,6 +15131,7 @@
           <a:lstStyle/>
           <a:p>
             <a:pPr algn="ctr"/>
+            <a:endParaRPr/>
           </a:p>
         </p:txBody>
       </p:sp>
@@ -15192,6 +15175,7 @@
           <a:lstStyle/>
           <a:p>
             <a:pPr algn="ctr"/>
+            <a:endParaRPr/>
           </a:p>
         </p:txBody>
       </p:sp>
@@ -15235,6 +15219,7 @@
           <a:lstStyle/>
           <a:p>
             <a:pPr algn="ctr"/>
+            <a:endParaRPr/>
           </a:p>
         </p:txBody>
       </p:sp>
@@ -15278,6 +15263,7 @@
           <a:lstStyle/>
           <a:p>
             <a:pPr algn="ctr"/>
+            <a:endParaRPr/>
           </a:p>
         </p:txBody>
       </p:sp>
@@ -15329,7 +15315,7 @@
           <p:nvPr/>
         </p:nvPicPr>
         <p:blipFill>
-          <a:blip r:embed="rId2"/>
+          <a:blip r:embed="rId3"/>
           <a:stretch>
             <a:fillRect/>
           </a:stretch>
@@ -15353,7 +15339,7 @@
 </file>
 
 <file path=ppt/slides/slide5.xml><?xml version="1.0" encoding="utf-8"?>
-<p:sld xmlns:a="http://schemas.openxmlformats.org/drawingml/2006/main" xmlns:p="http://schemas.openxmlformats.org/presentationml/2006/main" xmlns:r="http://schemas.openxmlformats.org/officeDocument/2006/relationships">
+<p:sld xmlns:a="http://schemas.openxmlformats.org/drawingml/2006/main" xmlns:r="http://schemas.openxmlformats.org/officeDocument/2006/relationships" xmlns:p="http://schemas.openxmlformats.org/presentationml/2006/main">
   <p:cSld>
     <p:spTree>
       <p:nvGrpSpPr>
@@ -15361,7 +15347,14 @@
         <p:cNvGrpSpPr/>
         <p:nvPr/>
       </p:nvGrpSpPr>
-      <p:grpSpPr/>
+      <p:grpSpPr>
+        <a:xfrm>
+          <a:off x="0" y="0"/>
+          <a:ext cx="0" cy="0"/>
+          <a:chOff x="0" y="0"/>
+          <a:chExt cx="0" cy="0"/>
+        </a:xfrm>
+      </p:grpSpPr>
       <p:sp>
         <p:nvSpPr>
           <p:cNvPr id="2" name="Rectangle 1"/>
@@ -15402,6 +15395,7 @@
           <a:lstStyle/>
           <a:p>
             <a:pPr algn="ctr"/>
+            <a:endParaRPr/>
           </a:p>
         </p:txBody>
       </p:sp>
@@ -15445,6 +15439,7 @@
           <a:lstStyle/>
           <a:p>
             <a:pPr algn="ctr"/>
+            <a:endParaRPr/>
           </a:p>
         </p:txBody>
       </p:sp>
@@ -15488,6 +15483,7 @@
           <a:lstStyle/>
           <a:p>
             <a:pPr algn="ctr"/>
+            <a:endParaRPr/>
           </a:p>
         </p:txBody>
       </p:sp>
@@ -15570,6 +15566,7 @@
           <a:lstStyle/>
           <a:p>
             <a:pPr algn="ctr"/>
+            <a:endParaRPr/>
           </a:p>
         </p:txBody>
       </p:sp>
@@ -15613,6 +15610,7 @@
           <a:lstStyle/>
           <a:p>
             <a:pPr algn="ctr"/>
+            <a:endParaRPr/>
           </a:p>
         </p:txBody>
       </p:sp>
@@ -15738,6 +15736,7 @@
           <a:lstStyle/>
           <a:p>
             <a:pPr algn="ctr"/>
+            <a:endParaRPr/>
           </a:p>
         </p:txBody>
       </p:sp>
@@ -15781,6 +15780,7 @@
           <a:lstStyle/>
           <a:p>
             <a:pPr algn="ctr"/>
+            <a:endParaRPr/>
           </a:p>
         </p:txBody>
       </p:sp>
@@ -15902,6 +15902,7 @@
           <a:lstStyle/>
           <a:p>
             <a:pPr algn="ctr"/>
+            <a:endParaRPr/>
           </a:p>
         </p:txBody>
       </p:sp>
@@ -15949,6 +15950,7 @@
           <a:lstStyle/>
           <a:p>
             <a:pPr algn="ctr"/>
+            <a:endParaRPr/>
           </a:p>
         </p:txBody>
       </p:sp>
@@ -15992,6 +15994,7 @@
           <a:lstStyle/>
           <a:p>
             <a:pPr algn="ctr"/>
+            <a:endParaRPr/>
           </a:p>
         </p:txBody>
       </p:sp>
@@ -16113,6 +16116,7 @@
           <a:lstStyle/>
           <a:p>
             <a:pPr algn="ctr"/>
+            <a:endParaRPr/>
           </a:p>
         </p:txBody>
       </p:sp>
@@ -16160,6 +16164,7 @@
           <a:lstStyle/>
           <a:p>
             <a:pPr algn="ctr"/>
+            <a:endParaRPr/>
           </a:p>
         </p:txBody>
       </p:sp>
@@ -16203,6 +16208,7 @@
           <a:lstStyle/>
           <a:p>
             <a:pPr algn="ctr"/>
+            <a:endParaRPr/>
           </a:p>
         </p:txBody>
       </p:sp>
@@ -16324,6 +16330,7 @@
           <a:lstStyle/>
           <a:p>
             <a:pPr algn="ctr"/>
+            <a:endParaRPr/>
           </a:p>
         </p:txBody>
       </p:sp>
@@ -16371,6 +16378,7 @@
           <a:lstStyle/>
           <a:p>
             <a:pPr algn="ctr"/>
+            <a:endParaRPr/>
           </a:p>
         </p:txBody>
       </p:sp>
@@ -16414,6 +16422,7 @@
           <a:lstStyle/>
           <a:p>
             <a:pPr algn="ctr"/>
+            <a:endParaRPr/>
           </a:p>
         </p:txBody>
       </p:sp>
@@ -16535,6 +16544,7 @@
           <a:lstStyle/>
           <a:p>
             <a:pPr algn="ctr"/>
+            <a:endParaRPr/>
           </a:p>
         </p:txBody>
       </p:sp>
@@ -16582,6 +16592,7 @@
           <a:lstStyle/>
           <a:p>
             <a:pPr algn="ctr"/>
+            <a:endParaRPr/>
           </a:p>
         </p:txBody>
       </p:sp>
@@ -16625,6 +16636,7 @@
           <a:lstStyle/>
           <a:p>
             <a:pPr algn="ctr"/>
+            <a:endParaRPr/>
           </a:p>
         </p:txBody>
       </p:sp>
@@ -16734,7 +16746,7 @@
               </a:spcAft>
             </a:pPr>
             <a:r>
-              <a:rPr sz="1300" b="0">
+              <a:rPr sz="1300" b="0" dirty="0">
                 <a:solidFill>
                   <a:srgbClr val="6B6560"/>
                 </a:solidFill>
@@ -16828,6 +16840,7 @@
           <a:lstStyle/>
           <a:p>
             <a:pPr algn="ctr"/>
+            <a:endParaRPr/>
           </a:p>
         </p:txBody>
       </p:sp>
@@ -16871,6 +16884,7 @@
           <a:lstStyle/>
           <a:p>
             <a:pPr algn="ctr"/>
+            <a:endParaRPr/>
           </a:p>
         </p:txBody>
       </p:sp>
@@ -16914,6 +16928,7 @@
           <a:lstStyle/>
           <a:p>
             <a:pPr algn="ctr"/>
+            <a:endParaRPr/>
           </a:p>
         </p:txBody>
       </p:sp>
@@ -16957,6 +16972,7 @@
           <a:lstStyle/>
           <a:p>
             <a:pPr algn="ctr"/>
+            <a:endParaRPr/>
           </a:p>
         </p:txBody>
       </p:sp>
@@ -17000,6 +17016,7 @@
           <a:lstStyle/>
           <a:p>
             <a:pPr algn="ctr"/>
+            <a:endParaRPr/>
           </a:p>
         </p:txBody>
       </p:sp>
@@ -17051,7 +17068,7 @@
           <p:nvPr/>
         </p:nvPicPr>
         <p:blipFill>
-          <a:blip r:embed="rId2"/>
+          <a:blip r:embed="rId3"/>
           <a:stretch>
             <a:fillRect/>
           </a:stretch>
@@ -17075,7 +17092,7 @@
         <p:spPr>
           <a:xfrm>
             <a:off x="6199632" y="2432304"/>
-            <a:ext cx="5349240" cy="237744"/>
+            <a:ext cx="5349240" cy="276999"/>
           </a:xfrm>
           <a:prstGeom prst="rect">
             <a:avLst/>
@@ -17094,13 +17111,13 @@
               </a:spcAft>
             </a:pPr>
             <a:r>
-              <a:rPr sz="1200" b="1">
+              <a:rPr sz="1200" b="1" dirty="0">
                 <a:solidFill>
                   <a:srgbClr val="3A4A38"/>
                 </a:solidFill>
                 <a:latin typeface="Calibri"/>
               </a:rPr>
-              <a:t>Storefront  ·  the same heading, live</a:t>
+              <a:t>Storefront</a:t>
             </a:r>
           </a:p>
         </p:txBody>
@@ -17149,6 +17166,7 @@
           <a:lstStyle/>
           <a:p>
             <a:pPr algn="ctr"/>
+            <a:endParaRPr/>
           </a:p>
         </p:txBody>
       </p:sp>
@@ -17192,6 +17210,7 @@
           <a:lstStyle/>
           <a:p>
             <a:pPr algn="ctr"/>
+            <a:endParaRPr/>
           </a:p>
         </p:txBody>
       </p:sp>
@@ -17235,6 +17254,7 @@
           <a:lstStyle/>
           <a:p>
             <a:pPr algn="ctr"/>
+            <a:endParaRPr/>
           </a:p>
         </p:txBody>
       </p:sp>
@@ -17278,6 +17298,7 @@
           <a:lstStyle/>
           <a:p>
             <a:pPr algn="ctr"/>
+            <a:endParaRPr/>
           </a:p>
         </p:txBody>
       </p:sp>
@@ -17321,6 +17342,7 @@
           <a:lstStyle/>
           <a:p>
             <a:pPr algn="ctr"/>
+            <a:endParaRPr/>
           </a:p>
         </p:txBody>
       </p:sp>
@@ -17372,7 +17394,7 @@
           <p:nvPr/>
         </p:nvPicPr>
         <p:blipFill>
-          <a:blip r:embed="rId3"/>
+          <a:blip r:embed="rId4"/>
           <a:stretch>
             <a:fillRect/>
           </a:stretch>
@@ -17396,7 +17418,7 @@
 </file>
 
 <file path=ppt/slides/slide6.xml><?xml version="1.0" encoding="utf-8"?>
-<p:sld xmlns:a="http://schemas.openxmlformats.org/drawingml/2006/main" xmlns:p="http://schemas.openxmlformats.org/presentationml/2006/main" xmlns:r="http://schemas.openxmlformats.org/officeDocument/2006/relationships">
+<p:sld xmlns:a="http://schemas.openxmlformats.org/drawingml/2006/main" xmlns:r="http://schemas.openxmlformats.org/officeDocument/2006/relationships" xmlns:p="http://schemas.openxmlformats.org/presentationml/2006/main">
   <p:cSld>
     <p:spTree>
       <p:nvGrpSpPr>
@@ -17404,7 +17426,14 @@
         <p:cNvGrpSpPr/>
         <p:nvPr/>
       </p:nvGrpSpPr>
-      <p:grpSpPr/>
+      <p:grpSpPr>
+        <a:xfrm>
+          <a:off x="0" y="0"/>
+          <a:ext cx="0" cy="0"/>
+          <a:chOff x="0" y="0"/>
+          <a:chExt cx="0" cy="0"/>
+        </a:xfrm>
+      </p:grpSpPr>
       <p:sp>
         <p:nvSpPr>
           <p:cNvPr id="2" name="Rectangle 1"/>
@@ -17445,6 +17474,7 @@
           <a:lstStyle/>
           <a:p>
             <a:pPr algn="ctr"/>
+            <a:endParaRPr/>
           </a:p>
         </p:txBody>
       </p:sp>
@@ -17488,6 +17518,7 @@
           <a:lstStyle/>
           <a:p>
             <a:pPr algn="ctr"/>
+            <a:endParaRPr/>
           </a:p>
         </p:txBody>
       </p:sp>
@@ -17531,6 +17562,7 @@
           <a:lstStyle/>
           <a:p>
             <a:pPr algn="ctr"/>
+            <a:endParaRPr/>
           </a:p>
         </p:txBody>
       </p:sp>
@@ -17613,6 +17645,7 @@
           <a:lstStyle/>
           <a:p>
             <a:pPr algn="ctr"/>
+            <a:endParaRPr/>
           </a:p>
         </p:txBody>
       </p:sp>
@@ -17656,6 +17689,7 @@
           <a:lstStyle/>
           <a:p>
             <a:pPr algn="ctr"/>
+            <a:endParaRPr/>
           </a:p>
         </p:txBody>
       </p:sp>
@@ -17781,6 +17815,7 @@
           <a:lstStyle/>
           <a:p>
             <a:pPr algn="ctr"/>
+            <a:endParaRPr/>
           </a:p>
         </p:txBody>
       </p:sp>
@@ -17826,6 +17861,7 @@
           <a:lstStyle/>
           <a:p>
             <a:pPr algn="ctr"/>
+            <a:endParaRPr/>
           </a:p>
         </p:txBody>
       </p:sp>
@@ -17990,6 +18026,7 @@
           <a:lstStyle/>
           <a:p>
             <a:pPr algn="ctr"/>
+            <a:endParaRPr/>
           </a:p>
         </p:txBody>
       </p:sp>
@@ -18035,6 +18072,7 @@
           <a:lstStyle/>
           <a:p>
             <a:pPr algn="ctr"/>
+            <a:endParaRPr/>
           </a:p>
         </p:txBody>
       </p:sp>
@@ -18199,6 +18237,7 @@
           <a:lstStyle/>
           <a:p>
             <a:pPr algn="ctr"/>
+            <a:endParaRPr/>
           </a:p>
         </p:txBody>
       </p:sp>
@@ -18244,6 +18283,7 @@
           <a:lstStyle/>
           <a:p>
             <a:pPr algn="ctr"/>
+            <a:endParaRPr/>
           </a:p>
         </p:txBody>
       </p:sp>
@@ -18408,6 +18448,7 @@
           <a:lstStyle/>
           <a:p>
             <a:pPr algn="ctr"/>
+            <a:endParaRPr/>
           </a:p>
         </p:txBody>
       </p:sp>
@@ -18453,6 +18494,7 @@
           <a:lstStyle/>
           <a:p>
             <a:pPr algn="ctr"/>
+            <a:endParaRPr/>
           </a:p>
         </p:txBody>
       </p:sp>
@@ -18617,6 +18659,7 @@
           <a:lstStyle/>
           <a:p>
             <a:pPr algn="ctr"/>
+            <a:endParaRPr/>
           </a:p>
         </p:txBody>
       </p:sp>
@@ -18662,6 +18705,7 @@
           <a:lstStyle/>
           <a:p>
             <a:pPr algn="ctr"/>
+            <a:endParaRPr/>
           </a:p>
         </p:txBody>
       </p:sp>
@@ -18865,6 +18909,7 @@
           <a:lstStyle/>
           <a:p>
             <a:pPr algn="ctr"/>
+            <a:endParaRPr/>
           </a:p>
         </p:txBody>
       </p:sp>
@@ -18908,6 +18953,7 @@
           <a:lstStyle/>
           <a:p>
             <a:pPr algn="ctr"/>
+            <a:endParaRPr/>
           </a:p>
         </p:txBody>
       </p:sp>
@@ -18951,6 +18997,7 @@
           <a:lstStyle/>
           <a:p>
             <a:pPr algn="ctr"/>
+            <a:endParaRPr/>
           </a:p>
         </p:txBody>
       </p:sp>
@@ -18994,6 +19041,7 @@
           <a:lstStyle/>
           <a:p>
             <a:pPr algn="ctr"/>
+            <a:endParaRPr/>
           </a:p>
         </p:txBody>
       </p:sp>
@@ -19037,6 +19085,7 @@
           <a:lstStyle/>
           <a:p>
             <a:pPr algn="ctr"/>
+            <a:endParaRPr/>
           </a:p>
         </p:txBody>
       </p:sp>
@@ -19088,7 +19137,7 @@
           <p:nvPr/>
         </p:nvPicPr>
         <p:blipFill>
-          <a:blip r:embed="rId2"/>
+          <a:blip r:embed="rId3"/>
           <a:stretch>
             <a:fillRect/>
           </a:stretch>
@@ -19112,7 +19161,7 @@
 </file>
 
 <file path=ppt/slides/slide7.xml><?xml version="1.0" encoding="utf-8"?>
-<p:sld xmlns:a="http://schemas.openxmlformats.org/drawingml/2006/main" xmlns:p="http://schemas.openxmlformats.org/presentationml/2006/main" xmlns:r="http://schemas.openxmlformats.org/officeDocument/2006/relationships">
+<p:sld xmlns:a="http://schemas.openxmlformats.org/drawingml/2006/main" xmlns:r="http://schemas.openxmlformats.org/officeDocument/2006/relationships" xmlns:p="http://schemas.openxmlformats.org/presentationml/2006/main">
   <p:cSld>
     <p:spTree>
       <p:nvGrpSpPr>
@@ -19120,7 +19169,14 @@
         <p:cNvGrpSpPr/>
         <p:nvPr/>
       </p:nvGrpSpPr>
-      <p:grpSpPr/>
+      <p:grpSpPr>
+        <a:xfrm>
+          <a:off x="0" y="0"/>
+          <a:ext cx="0" cy="0"/>
+          <a:chOff x="0" y="0"/>
+          <a:chExt cx="0" cy="0"/>
+        </a:xfrm>
+      </p:grpSpPr>
       <p:sp>
         <p:nvSpPr>
           <p:cNvPr id="2" name="Rectangle 1"/>
@@ -19161,6 +19217,7 @@
           <a:lstStyle/>
           <a:p>
             <a:pPr algn="ctr"/>
+            <a:endParaRPr/>
           </a:p>
         </p:txBody>
       </p:sp>
@@ -19204,6 +19261,7 @@
           <a:lstStyle/>
           <a:p>
             <a:pPr algn="ctr"/>
+            <a:endParaRPr/>
           </a:p>
         </p:txBody>
       </p:sp>
@@ -19247,6 +19305,7 @@
           <a:lstStyle/>
           <a:p>
             <a:pPr algn="ctr"/>
+            <a:endParaRPr/>
           </a:p>
         </p:txBody>
       </p:sp>
@@ -19329,6 +19388,7 @@
           <a:lstStyle/>
           <a:p>
             <a:pPr algn="ctr"/>
+            <a:endParaRPr/>
           </a:p>
         </p:txBody>
       </p:sp>
@@ -19372,6 +19432,7 @@
           <a:lstStyle/>
           <a:p>
             <a:pPr algn="ctr"/>
+            <a:endParaRPr/>
           </a:p>
         </p:txBody>
       </p:sp>
@@ -19495,6 +19556,7 @@
           <a:lstStyle/>
           <a:p>
             <a:pPr algn="ctr"/>
+            <a:endParaRPr/>
           </a:p>
         </p:txBody>
       </p:sp>
@@ -19577,6 +19639,7 @@
           <a:lstStyle/>
           <a:p>
             <a:pPr algn="ctr"/>
+            <a:endParaRPr/>
           </a:p>
         </p:txBody>
       </p:sp>
@@ -19702,6 +19765,7 @@
           <a:lstStyle/>
           <a:p>
             <a:pPr algn="ctr"/>
+            <a:endParaRPr/>
           </a:p>
         </p:txBody>
       </p:sp>
@@ -19714,7 +19778,7 @@
           <p:nvPr/>
         </p:nvPicPr>
         <p:blipFill>
-          <a:blip r:embed="rId2"/>
+          <a:blip r:embed="rId3"/>
           <a:stretch>
             <a:fillRect/>
           </a:stretch>
@@ -19808,6 +19872,7 @@
           <a:lstStyle/>
           <a:p>
             <a:pPr algn="ctr"/>
+            <a:endParaRPr/>
           </a:p>
         </p:txBody>
       </p:sp>
@@ -19933,6 +19998,7 @@
           <a:lstStyle/>
           <a:p>
             <a:pPr algn="ctr"/>
+            <a:endParaRPr/>
           </a:p>
         </p:txBody>
       </p:sp>
@@ -19945,7 +20011,7 @@
           <p:nvPr/>
         </p:nvPicPr>
         <p:blipFill>
-          <a:blip r:embed="rId3"/>
+          <a:blip r:embed="rId4"/>
           <a:stretch>
             <a:fillRect/>
           </a:stretch>
@@ -20039,6 +20105,7 @@
           <a:lstStyle/>
           <a:p>
             <a:pPr algn="ctr"/>
+            <a:endParaRPr/>
           </a:p>
         </p:txBody>
       </p:sp>
@@ -20164,6 +20231,7 @@
           <a:lstStyle/>
           <a:p>
             <a:pPr algn="ctr"/>
+            <a:endParaRPr/>
           </a:p>
         </p:txBody>
       </p:sp>
@@ -20176,7 +20244,7 @@
           <p:nvPr/>
         </p:nvPicPr>
         <p:blipFill>
-          <a:blip r:embed="rId4"/>
+          <a:blip r:embed="rId5"/>
           <a:stretch>
             <a:fillRect/>
           </a:stretch>
@@ -20270,6 +20338,7 @@
           <a:lstStyle/>
           <a:p>
             <a:pPr algn="ctr"/>
+            <a:endParaRPr/>
           </a:p>
         </p:txBody>
       </p:sp>
@@ -20395,6 +20464,7 @@
           <a:lstStyle/>
           <a:p>
             <a:pPr algn="ctr"/>
+            <a:endParaRPr/>
           </a:p>
         </p:txBody>
       </p:sp>
@@ -20407,7 +20477,7 @@
           <p:nvPr/>
         </p:nvPicPr>
         <p:blipFill>
-          <a:blip r:embed="rId5"/>
+          <a:blip r:embed="rId6"/>
           <a:stretch>
             <a:fillRect/>
           </a:stretch>
@@ -20470,7 +20540,7 @@
 </file>
 
 <file path=ppt/slides/slide8.xml><?xml version="1.0" encoding="utf-8"?>
-<p:sld xmlns:a="http://schemas.openxmlformats.org/drawingml/2006/main" xmlns:p="http://schemas.openxmlformats.org/presentationml/2006/main" xmlns:r="http://schemas.openxmlformats.org/officeDocument/2006/relationships">
+<p:sld xmlns:a="http://schemas.openxmlformats.org/drawingml/2006/main" xmlns:r="http://schemas.openxmlformats.org/officeDocument/2006/relationships" xmlns:p="http://schemas.openxmlformats.org/presentationml/2006/main">
   <p:cSld>
     <p:spTree>
       <p:nvGrpSpPr>
@@ -20478,7 +20548,14 @@
         <p:cNvGrpSpPr/>
         <p:nvPr/>
       </p:nvGrpSpPr>
-      <p:grpSpPr/>
+      <p:grpSpPr>
+        <a:xfrm>
+          <a:off x="0" y="0"/>
+          <a:ext cx="0" cy="0"/>
+          <a:chOff x="0" y="0"/>
+          <a:chExt cx="0" cy="0"/>
+        </a:xfrm>
+      </p:grpSpPr>
       <p:sp>
         <p:nvSpPr>
           <p:cNvPr id="2" name="Rectangle 1"/>
@@ -20519,6 +20596,7 @@
           <a:lstStyle/>
           <a:p>
             <a:pPr algn="ctr"/>
+            <a:endParaRPr/>
           </a:p>
         </p:txBody>
       </p:sp>
@@ -20562,6 +20640,7 @@
           <a:lstStyle/>
           <a:p>
             <a:pPr algn="ctr"/>
+            <a:endParaRPr/>
           </a:p>
         </p:txBody>
       </p:sp>
@@ -20605,6 +20684,7 @@
           <a:lstStyle/>
           <a:p>
             <a:pPr algn="ctr"/>
+            <a:endParaRPr/>
           </a:p>
         </p:txBody>
       </p:sp>
@@ -20687,6 +20767,7 @@
           <a:lstStyle/>
           <a:p>
             <a:pPr algn="ctr"/>
+            <a:endParaRPr/>
           </a:p>
         </p:txBody>
       </p:sp>
@@ -20730,6 +20811,7 @@
           <a:lstStyle/>
           <a:p>
             <a:pPr algn="ctr"/>
+            <a:endParaRPr/>
           </a:p>
         </p:txBody>
       </p:sp>
@@ -20855,6 +20937,7 @@
           <a:lstStyle/>
           <a:p>
             <a:pPr algn="ctr"/>
+            <a:endParaRPr/>
           </a:p>
         </p:txBody>
       </p:sp>
@@ -20900,6 +20983,7 @@
           <a:lstStyle/>
           <a:p>
             <a:pPr algn="ctr"/>
+            <a:endParaRPr/>
           </a:p>
         </p:txBody>
       </p:sp>
@@ -21064,6 +21148,7 @@
           <a:lstStyle/>
           <a:p>
             <a:pPr algn="ctr"/>
+            <a:endParaRPr/>
           </a:p>
         </p:txBody>
       </p:sp>
@@ -21109,6 +21194,7 @@
           <a:lstStyle/>
           <a:p>
             <a:pPr algn="ctr"/>
+            <a:endParaRPr/>
           </a:p>
         </p:txBody>
       </p:sp>
@@ -21273,6 +21359,7 @@
           <a:lstStyle/>
           <a:p>
             <a:pPr algn="ctr"/>
+            <a:endParaRPr/>
           </a:p>
         </p:txBody>
       </p:sp>
@@ -21318,6 +21405,7 @@
           <a:lstStyle/>
           <a:p>
             <a:pPr algn="ctr"/>
+            <a:endParaRPr/>
           </a:p>
         </p:txBody>
       </p:sp>
@@ -21482,6 +21570,7 @@
           <a:lstStyle/>
           <a:p>
             <a:pPr algn="ctr"/>
+            <a:endParaRPr/>
           </a:p>
         </p:txBody>
       </p:sp>
@@ -21527,6 +21616,7 @@
           <a:lstStyle/>
           <a:p>
             <a:pPr algn="ctr"/>
+            <a:endParaRPr/>
           </a:p>
         </p:txBody>
       </p:sp>
@@ -21691,6 +21781,7 @@
           <a:lstStyle/>
           <a:p>
             <a:pPr algn="ctr"/>
+            <a:endParaRPr/>
           </a:p>
         </p:txBody>
       </p:sp>
@@ -21736,6 +21827,7 @@
           <a:lstStyle/>
           <a:p>
             <a:pPr algn="ctr"/>
+            <a:endParaRPr/>
           </a:p>
         </p:txBody>
       </p:sp>
@@ -21939,6 +22031,7 @@
           <a:lstStyle/>
           <a:p>
             <a:pPr algn="ctr"/>
+            <a:endParaRPr/>
           </a:p>
         </p:txBody>
       </p:sp>
@@ -21982,6 +22075,7 @@
           <a:lstStyle/>
           <a:p>
             <a:pPr algn="ctr"/>
+            <a:endParaRPr/>
           </a:p>
         </p:txBody>
       </p:sp>
@@ -22025,6 +22119,7 @@
           <a:lstStyle/>
           <a:p>
             <a:pPr algn="ctr"/>
+            <a:endParaRPr/>
           </a:p>
         </p:txBody>
       </p:sp>
@@ -22068,6 +22163,7 @@
           <a:lstStyle/>
           <a:p>
             <a:pPr algn="ctr"/>
+            <a:endParaRPr/>
           </a:p>
         </p:txBody>
       </p:sp>
@@ -22111,6 +22207,7 @@
           <a:lstStyle/>
           <a:p>
             <a:pPr algn="ctr"/>
+            <a:endParaRPr/>
           </a:p>
         </p:txBody>
       </p:sp>
@@ -22162,7 +22259,7 @@
           <p:nvPr/>
         </p:nvPicPr>
         <p:blipFill>
-          <a:blip r:embed="rId2"/>
+          <a:blip r:embed="rId3"/>
           <a:stretch>
             <a:fillRect/>
           </a:stretch>
@@ -22186,7 +22283,7 @@
 </file>
 
 <file path=ppt/slides/slide9.xml><?xml version="1.0" encoding="utf-8"?>
-<p:sld xmlns:a="http://schemas.openxmlformats.org/drawingml/2006/main" xmlns:p="http://schemas.openxmlformats.org/presentationml/2006/main" xmlns:r="http://schemas.openxmlformats.org/officeDocument/2006/relationships">
+<p:sld xmlns:a="http://schemas.openxmlformats.org/drawingml/2006/main" xmlns:r="http://schemas.openxmlformats.org/officeDocument/2006/relationships" xmlns:p="http://schemas.openxmlformats.org/presentationml/2006/main">
   <p:cSld>
     <p:spTree>
       <p:nvGrpSpPr>
@@ -22194,7 +22291,14 @@
         <p:cNvGrpSpPr/>
         <p:nvPr/>
       </p:nvGrpSpPr>
-      <p:grpSpPr/>
+      <p:grpSpPr>
+        <a:xfrm>
+          <a:off x="0" y="0"/>
+          <a:ext cx="0" cy="0"/>
+          <a:chOff x="0" y="0"/>
+          <a:chExt cx="0" cy="0"/>
+        </a:xfrm>
+      </p:grpSpPr>
       <p:sp>
         <p:nvSpPr>
           <p:cNvPr id="2" name="Rectangle 1"/>
@@ -22235,6 +22339,7 @@
           <a:lstStyle/>
           <a:p>
             <a:pPr algn="ctr"/>
+            <a:endParaRPr/>
           </a:p>
         </p:txBody>
       </p:sp>
@@ -22278,6 +22383,7 @@
           <a:lstStyle/>
           <a:p>
             <a:pPr algn="ctr"/>
+            <a:endParaRPr/>
           </a:p>
         </p:txBody>
       </p:sp>
@@ -22321,6 +22427,7 @@
           <a:lstStyle/>
           <a:p>
             <a:pPr algn="ctr"/>
+            <a:endParaRPr/>
           </a:p>
         </p:txBody>
       </p:sp>
@@ -22474,6 +22581,7 @@
           <a:lstStyle/>
           <a:p>
             <a:pPr algn="ctr"/>
+            <a:endParaRPr/>
           </a:p>
         </p:txBody>
       </p:sp>
@@ -22933,44 +23041,44 @@
         <a:sysClr val="window" lastClr="FFFFFF"/>
       </a:lt1>
       <a:dk2>
-        <a:srgbClr val="1F497D"/>
+        <a:srgbClr val="0E2841"/>
       </a:dk2>
       <a:lt2>
-        <a:srgbClr val="EEECE1"/>
+        <a:srgbClr val="E8E8E8"/>
       </a:lt2>
       <a:accent1>
-        <a:srgbClr val="4F81BD"/>
+        <a:srgbClr val="156082"/>
       </a:accent1>
       <a:accent2>
-        <a:srgbClr val="C0504D"/>
+        <a:srgbClr val="E97132"/>
       </a:accent2>
       <a:accent3>
-        <a:srgbClr val="9BBB59"/>
+        <a:srgbClr val="196B24"/>
       </a:accent3>
       <a:accent4>
-        <a:srgbClr val="8064A2"/>
+        <a:srgbClr val="0F9ED5"/>
       </a:accent4>
       <a:accent5>
-        <a:srgbClr val="4BACC6"/>
+        <a:srgbClr val="A02B93"/>
       </a:accent5>
       <a:accent6>
-        <a:srgbClr val="F79646"/>
+        <a:srgbClr val="4EA72E"/>
       </a:accent6>
       <a:hlink>
-        <a:srgbClr val="0000FF"/>
+        <a:srgbClr val="467886"/>
       </a:hlink>
       <a:folHlink>
-        <a:srgbClr val="800080"/>
+        <a:srgbClr val="96607D"/>
       </a:folHlink>
     </a:clrScheme>
     <a:fontScheme name="Office">
       <a:majorFont>
-        <a:latin typeface="Calibri"/>
+        <a:latin typeface="Aptos Display" panose="02110004020202020204"/>
         <a:ea typeface=""/>
         <a:cs typeface=""/>
-        <a:font script="Jpan" typeface="ＭＳ Ｐゴシック"/>
+        <a:font script="Jpan" typeface="游ゴシック Light"/>
         <a:font script="Hang" typeface="맑은 고딕"/>
-        <a:font script="Hans" typeface="宋体"/>
+        <a:font script="Hans" typeface="等线 Light"/>
         <a:font script="Hant" typeface="新細明體"/>
         <a:font script="Arab" typeface="Times New Roman"/>
         <a:font script="Hebr" typeface="Times New Roman"/>
@@ -22998,14 +23106,31 @@
         <a:font script="Viet" typeface="Times New Roman"/>
         <a:font script="Uigh" typeface="Microsoft Uighur"/>
         <a:font script="Geor" typeface="Sylfaen"/>
+        <a:font script="Armn" typeface="Arial"/>
+        <a:font script="Bugi" typeface="Leelawadee UI"/>
+        <a:font script="Bopo" typeface="Microsoft JhengHei"/>
+        <a:font script="Java" typeface="Javanese Text"/>
+        <a:font script="Lisu" typeface="Segoe UI"/>
+        <a:font script="Mymr" typeface="Myanmar Text"/>
+        <a:font script="Nkoo" typeface="Ebrima"/>
+        <a:font script="Olck" typeface="Nirmala UI"/>
+        <a:font script="Osma" typeface="Ebrima"/>
+        <a:font script="Phag" typeface="Phagspa"/>
+        <a:font script="Syrn" typeface="Estrangelo Edessa"/>
+        <a:font script="Syrj" typeface="Estrangelo Edessa"/>
+        <a:font script="Syre" typeface="Estrangelo Edessa"/>
+        <a:font script="Sora" typeface="Nirmala UI"/>
+        <a:font script="Tale" typeface="Microsoft Tai Le"/>
+        <a:font script="Talu" typeface="Microsoft New Tai Lue"/>
+        <a:font script="Tfng" typeface="Ebrima"/>
       </a:majorFont>
       <a:minorFont>
-        <a:latin typeface="Calibri"/>
+        <a:latin typeface="Aptos" panose="02110004020202020204"/>
         <a:ea typeface=""/>
         <a:cs typeface=""/>
-        <a:font script="Jpan" typeface="ＭＳ Ｐゴシック"/>
+        <a:font script="Jpan" typeface="游ゴシック"/>
         <a:font script="Hang" typeface="맑은 고딕"/>
-        <a:font script="Hans" typeface="宋体"/>
+        <a:font script="Hans" typeface="等线"/>
         <a:font script="Hant" typeface="新細明體"/>
         <a:font script="Arab" typeface="Arial"/>
         <a:font script="Hebr" typeface="Arial"/>
@@ -23033,6 +23158,23 @@
         <a:font script="Viet" typeface="Arial"/>
         <a:font script="Uigh" typeface="Microsoft Uighur"/>
         <a:font script="Geor" typeface="Sylfaen"/>
+        <a:font script="Armn" typeface="Arial"/>
+        <a:font script="Bugi" typeface="Leelawadee UI"/>
+        <a:font script="Bopo" typeface="Microsoft JhengHei"/>
+        <a:font script="Java" typeface="Javanese Text"/>
+        <a:font script="Lisu" typeface="Segoe UI"/>
+        <a:font script="Mymr" typeface="Myanmar Text"/>
+        <a:font script="Nkoo" typeface="Ebrima"/>
+        <a:font script="Olck" typeface="Nirmala UI"/>
+        <a:font script="Osma" typeface="Ebrima"/>
+        <a:font script="Phag" typeface="Phagspa"/>
+        <a:font script="Syrn" typeface="Estrangelo Edessa"/>
+        <a:font script="Syrj" typeface="Estrangelo Edessa"/>
+        <a:font script="Syre" typeface="Estrangelo Edessa"/>
+        <a:font script="Sora" typeface="Nirmala UI"/>
+        <a:font script="Tale" typeface="Microsoft Tai Le"/>
+        <a:font script="Talu" typeface="Microsoft New Tai Lue"/>
+        <a:font script="Tfng" typeface="Ebrima"/>
       </a:minorFont>
     </a:fontScheme>
     <a:fmtScheme name="Office">
@@ -23044,180 +23186,136 @@
           <a:gsLst>
             <a:gs pos="0">
               <a:schemeClr val="phClr">
-                <a:tint val="50000"/>
-                <a:satMod val="300000"/>
+                <a:lumMod val="110000"/>
+                <a:satMod val="105000"/>
+                <a:tint val="67000"/>
               </a:schemeClr>
             </a:gs>
-            <a:gs pos="35000">
+            <a:gs pos="50000">
               <a:schemeClr val="phClr">
-                <a:tint val="37000"/>
-                <a:satMod val="300000"/>
+                <a:lumMod val="105000"/>
+                <a:satMod val="103000"/>
+                <a:tint val="73000"/>
               </a:schemeClr>
             </a:gs>
             <a:gs pos="100000">
               <a:schemeClr val="phClr">
-                <a:tint val="15000"/>
-                <a:satMod val="350000"/>
+                <a:lumMod val="105000"/>
+                <a:satMod val="109000"/>
+                <a:tint val="81000"/>
               </a:schemeClr>
             </a:gs>
           </a:gsLst>
-          <a:lin ang="16200000" scaled="1"/>
+          <a:lin ang="5400000" scaled="0"/>
         </a:gradFill>
         <a:gradFill rotWithShape="1">
           <a:gsLst>
             <a:gs pos="0">
               <a:schemeClr val="phClr">
-                <a:tint val="100000"/>
+                <a:satMod val="103000"/>
+                <a:lumMod val="102000"/>
+                <a:tint val="94000"/>
+              </a:schemeClr>
+            </a:gs>
+            <a:gs pos="50000">
+              <a:schemeClr val="phClr">
+                <a:satMod val="110000"/>
+                <a:lumMod val="100000"/>
                 <a:shade val="100000"/>
-                <a:satMod val="130000"/>
               </a:schemeClr>
             </a:gs>
             <a:gs pos="100000">
               <a:schemeClr val="phClr">
-                <a:tint val="50000"/>
-                <a:shade val="100000"/>
-                <a:satMod val="350000"/>
+                <a:lumMod val="99000"/>
+                <a:satMod val="120000"/>
+                <a:shade val="78000"/>
               </a:schemeClr>
             </a:gs>
           </a:gsLst>
-          <a:lin ang="16200000" scaled="0"/>
+          <a:lin ang="5400000" scaled="0"/>
         </a:gradFill>
       </a:fillStyleLst>
       <a:lnStyleLst>
-        <a:ln w="9525" cap="flat" cmpd="sng" algn="ctr">
+        <a:ln w="12700" cap="flat" cmpd="sng" algn="ctr">
           <a:solidFill>
-            <a:schemeClr val="phClr">
-              <a:shade val="95000"/>
-              <a:satMod val="105000"/>
-            </a:schemeClr>
+            <a:schemeClr val="phClr"/>
           </a:solidFill>
           <a:prstDash val="solid"/>
+          <a:miter lim="800000"/>
+        </a:ln>
+        <a:ln w="19050" cap="flat" cmpd="sng" algn="ctr">
+          <a:solidFill>
+            <a:schemeClr val="phClr"/>
+          </a:solidFill>
+          <a:prstDash val="solid"/>
+          <a:miter lim="800000"/>
         </a:ln>
         <a:ln w="25400" cap="flat" cmpd="sng" algn="ctr">
           <a:solidFill>
             <a:schemeClr val="phClr"/>
           </a:solidFill>
           <a:prstDash val="solid"/>
-        </a:ln>
-        <a:ln w="38100" cap="flat" cmpd="sng" algn="ctr">
-          <a:solidFill>
-            <a:schemeClr val="phClr"/>
-          </a:solidFill>
-          <a:prstDash val="solid"/>
+          <a:miter lim="800000"/>
         </a:ln>
       </a:lnStyleLst>
       <a:effectStyleLst>
         <a:effectStyle>
+          <a:effectLst/>
+        </a:effectStyle>
+        <a:effectStyle>
+          <a:effectLst/>
+        </a:effectStyle>
+        <a:effectStyle>
           <a:effectLst>
-            <a:outerShdw blurRad="40000" dist="20000" dir="5400000" rotWithShape="0">
+            <a:outerShdw blurRad="57150" dist="19050" dir="5400000" algn="ctr" rotWithShape="0">
               <a:srgbClr val="000000">
-                <a:alpha val="38000"/>
+                <a:alpha val="63000"/>
               </a:srgbClr>
             </a:outerShdw>
           </a:effectLst>
-        </a:effectStyle>
-        <a:effectStyle>
-          <a:effectLst>
-            <a:outerShdw blurRad="40000" dist="23000" dir="5400000" rotWithShape="0">
-              <a:srgbClr val="000000">
-                <a:alpha val="35000"/>
-              </a:srgbClr>
-            </a:outerShdw>
-          </a:effectLst>
-        </a:effectStyle>
-        <a:effectStyle>
-          <a:effectLst>
-            <a:outerShdw blurRad="40000" dist="23000" dir="5400000" rotWithShape="0">
-              <a:srgbClr val="000000">
-                <a:alpha val="35000"/>
-              </a:srgbClr>
-            </a:outerShdw>
-          </a:effectLst>
-          <a:scene3d>
-            <a:camera prst="orthographicFront">
-              <a:rot lat="0" lon="0" rev="0"/>
-            </a:camera>
-            <a:lightRig rig="threePt" dir="t">
-              <a:rot lat="0" lon="0" rev="1200000"/>
-            </a:lightRig>
-          </a:scene3d>
-          <a:sp3d>
-            <a:bevelT w="63500" h="25400"/>
-          </a:sp3d>
         </a:effectStyle>
       </a:effectStyleLst>
       <a:bgFillStyleLst>
         <a:solidFill>
           <a:schemeClr val="phClr"/>
         </a:solidFill>
+        <a:solidFill>
+          <a:schemeClr val="phClr">
+            <a:tint val="95000"/>
+            <a:satMod val="170000"/>
+          </a:schemeClr>
+        </a:solidFill>
         <a:gradFill rotWithShape="1">
           <a:gsLst>
             <a:gs pos="0">
               <a:schemeClr val="phClr">
-                <a:tint val="40000"/>
-                <a:satMod val="350000"/>
+                <a:tint val="93000"/>
+                <a:satMod val="150000"/>
+                <a:shade val="98000"/>
+                <a:lumMod val="102000"/>
               </a:schemeClr>
             </a:gs>
-            <a:gs pos="40000">
+            <a:gs pos="50000">
               <a:schemeClr val="phClr">
-                <a:tint val="45000"/>
-                <a:shade val="99000"/>
-                <a:satMod val="350000"/>
+                <a:tint val="98000"/>
+                <a:satMod val="130000"/>
+                <a:shade val="90000"/>
+                <a:lumMod val="103000"/>
               </a:schemeClr>
             </a:gs>
             <a:gs pos="100000">
               <a:schemeClr val="phClr">
-                <a:shade val="20000"/>
-                <a:satMod val="255000"/>
+                <a:shade val="63000"/>
+                <a:satMod val="120000"/>
               </a:schemeClr>
             </a:gs>
           </a:gsLst>
-          <a:path path="circle">
-            <a:fillToRect l="50000" t="-80000" r="50000" b="180000"/>
-          </a:path>
-        </a:gradFill>
-        <a:gradFill rotWithShape="1">
-          <a:gsLst>
-            <a:gs pos="0">
-              <a:schemeClr val="phClr">
-                <a:tint val="80000"/>
-                <a:satMod val="300000"/>
-              </a:schemeClr>
-            </a:gs>
-            <a:gs pos="100000">
-              <a:schemeClr val="phClr">
-                <a:shade val="30000"/>
-                <a:satMod val="200000"/>
-              </a:schemeClr>
-            </a:gs>
-          </a:gsLst>
-          <a:path path="circle">
-            <a:fillToRect l="50000" t="50000" r="50000" b="50000"/>
-          </a:path>
+          <a:lin ang="5400000" scaled="0"/>
         </a:gradFill>
       </a:bgFillStyleLst>
     </a:fmtScheme>
   </a:themeElements>
   <a:objectDefaults>
-    <a:spDef>
-      <a:spPr/>
-      <a:bodyPr/>
-      <a:lstStyle/>
-      <a:style>
-        <a:lnRef idx="1">
-          <a:schemeClr val="accent1"/>
-        </a:lnRef>
-        <a:fillRef idx="3">
-          <a:schemeClr val="accent1"/>
-        </a:fillRef>
-        <a:effectRef idx="2">
-          <a:schemeClr val="accent1"/>
-        </a:effectRef>
-        <a:fontRef idx="minor">
-          <a:schemeClr val="lt1"/>
-        </a:fontRef>
-      </a:style>
-    </a:spDef>
     <a:lnDef>
       <a:spPr/>
       <a:bodyPr/>
@@ -23239,5 +23337,10 @@
     </a:lnDef>
   </a:objectDefaults>
   <a:extraClrSchemeLst/>
+  <a:extLst>
+    <a:ext uri="{05A4C25C-085E-4340-85A3-A5531E510DB2}">
+      <thm15:themeFamily xmlns:thm15="http://schemas.microsoft.com/office/thememl/2012/main" name="Office Theme" id="{2E142A2C-CD16-42D6-873A-C26D2A0506FA}" vid="{1BDDFF52-6CD6-40A5-AB3C-68EB2F1E4D0A}"/>
+    </a:ext>
+  </a:extLst>
 </a:theme>
 </file>
--- a/presentation/Thorn-and-Furrow-Portfolio.pptx
+++ b/presentation/Thorn-and-Furrow-Portfolio.pptx
@@ -4886,7 +4886,7 @@
         </p:nvSpPr>
         <p:spPr>
           <a:xfrm>
-            <a:off x="658368" y="1874519"/>
+            <a:off x="420624" y="1874520"/>
             <a:ext cx="6492240" cy="1097280"/>
           </a:xfrm>
           <a:prstGeom prst="rect">
@@ -4906,7 +4906,7 @@
               </a:spcAft>
             </a:pPr>
             <a:r>
-              <a:rPr sz="4400" b="1">
+              <a:rPr sz="4400" b="1" dirty="0">
                 <a:solidFill>
                   <a:srgbClr val="FFFFFF"/>
                 </a:solidFill>
@@ -11980,7 +11980,7 @@
               </a:spcAft>
             </a:pPr>
             <a:r>
-              <a:rPr sz="2000" b="1">
+              <a:rPr sz="2000" b="1" dirty="0">
                 <a:solidFill>
                   <a:srgbClr val="12110F"/>
                 </a:solidFill>
@@ -12019,7 +12019,7 @@
               </a:spcAft>
             </a:pPr>
             <a:r>
-              <a:rPr sz="1200" b="0">
+              <a:rPr sz="1200" b="0" dirty="0">
                 <a:solidFill>
                   <a:srgbClr val="6B6560"/>
                 </a:solidFill>
@@ -12359,7 +12359,7 @@
               </a:spcAft>
             </a:pPr>
             <a:r>
-              <a:rPr sz="1200" b="0">
+              <a:rPr sz="1200" b="0" dirty="0">
                 <a:solidFill>
                   <a:srgbClr val="6B6560"/>
                 </a:solidFill>
@@ -14498,7 +14498,7 @@
               </a:spcAft>
             </a:pPr>
             <a:r>
-              <a:rPr sz="1200" b="0">
+              <a:rPr sz="1200" b="0" dirty="0">
                 <a:solidFill>
                   <a:srgbClr val="6B6560"/>
                 </a:solidFill>
@@ -14663,7 +14663,7 @@
               </a:spcAft>
             </a:pPr>
             <a:r>
-              <a:rPr sz="1200" b="0">
+              <a:rPr sz="1200" b="0" dirty="0">
                 <a:solidFill>
                   <a:srgbClr val="6B6560"/>
                 </a:solidFill>
@@ -14828,7 +14828,7 @@
               </a:spcAft>
             </a:pPr>
             <a:r>
-              <a:rPr sz="1200" b="0">
+              <a:rPr sz="1200" b="0" dirty="0">
                 <a:solidFill>
                   <a:srgbClr val="6B6560"/>
                 </a:solidFill>
@@ -14993,13 +14993,67 @@
               </a:spcAft>
             </a:pPr>
             <a:r>
-              <a:rPr sz="1200" b="0">
+              <a:rPr sz="1200" b="0" dirty="0">
                 <a:solidFill>
                   <a:srgbClr val="6B6560"/>
                 </a:solidFill>
                 <a:latin typeface="Calibri"/>
               </a:rPr>
-              <a:t>GTM keys off eventId (hero_order, nav_order), not the words on the button. Copy can change. Measurement does not.</a:t>
+              <a:t>GTM keys off </a:t>
+            </a:r>
+            <a:r>
+              <a:rPr sz="1200" b="0" dirty="0" err="1">
+                <a:solidFill>
+                  <a:srgbClr val="6B6560"/>
+                </a:solidFill>
+                <a:latin typeface="Calibri"/>
+              </a:rPr>
+              <a:t>eventId</a:t>
+            </a:r>
+            <a:r>
+              <a:rPr sz="1200" b="0" dirty="0">
+                <a:solidFill>
+                  <a:srgbClr val="6B6560"/>
+                </a:solidFill>
+                <a:latin typeface="Calibri"/>
+              </a:rPr>
+              <a:t> (</a:t>
+            </a:r>
+            <a:r>
+              <a:rPr sz="1200" b="0" dirty="0" err="1">
+                <a:solidFill>
+                  <a:srgbClr val="6B6560"/>
+                </a:solidFill>
+                <a:latin typeface="Calibri"/>
+              </a:rPr>
+              <a:t>hero_order</a:t>
+            </a:r>
+            <a:r>
+              <a:rPr sz="1200" b="0" dirty="0">
+                <a:solidFill>
+                  <a:srgbClr val="6B6560"/>
+                </a:solidFill>
+                <a:latin typeface="Calibri"/>
+              </a:rPr>
+              <a:t>, </a:t>
+            </a:r>
+            <a:r>
+              <a:rPr sz="1200" b="0" dirty="0" err="1">
+                <a:solidFill>
+                  <a:srgbClr val="6B6560"/>
+                </a:solidFill>
+                <a:latin typeface="Calibri"/>
+              </a:rPr>
+              <a:t>nav_order</a:t>
+            </a:r>
+            <a:r>
+              <a:rPr sz="1200" b="0" dirty="0">
+                <a:solidFill>
+                  <a:srgbClr val="6B6560"/>
+                </a:solidFill>
+                <a:latin typeface="Calibri"/>
+              </a:rPr>
+              <a:t>), not the words on the button. Copy can change. Measurement does not.</a:t>
             </a:r>
           </a:p>
         </p:txBody>
@@ -18604,7 +18658,7 @@
               </a:spcAft>
             </a:pPr>
             <a:r>
-              <a:rPr sz="1100" b="0">
+              <a:rPr sz="1100" b="0" dirty="0">
                 <a:solidFill>
                   <a:srgbClr val="6B6560"/>
                 </a:solidFill>
@@ -18854,13 +18908,31 @@
               </a:spcAft>
             </a:pPr>
             <a:r>
-              <a:rPr sz="1200" b="0">
+              <a:rPr sz="1200" b="0" dirty="0">
                 <a:solidFill>
                   <a:srgbClr val="6B6560"/>
                 </a:solidFill>
                 <a:latin typeface="Calibri"/>
               </a:rPr>
-              <a:t>Icehouse Tomato open in Studio — common name, latin, slug. Change it once; home, packet page, and order form all follow.</a:t>
+              <a:t>Icehouse Tomato open in Studio — common name, </a:t>
+            </a:r>
+            <a:r>
+              <a:rPr sz="1200" b="0" dirty="0" err="1">
+                <a:solidFill>
+                  <a:srgbClr val="6B6560"/>
+                </a:solidFill>
+                <a:latin typeface="Calibri"/>
+              </a:rPr>
+              <a:t>latin</a:t>
+            </a:r>
+            <a:r>
+              <a:rPr sz="1200" b="0" dirty="0">
+                <a:solidFill>
+                  <a:srgbClr val="6B6560"/>
+                </a:solidFill>
+                <a:latin typeface="Calibri"/>
+              </a:rPr>
+              <a:t>, slug. Change it once; home, packet page, and order form all follow.</a:t>
             </a:r>
           </a:p>
         </p:txBody>
@@ -19337,7 +19409,7 @@
               </a:spcAft>
             </a:pPr>
             <a:r>
-              <a:rPr sz="3200" b="1">
+              <a:rPr sz="3200" b="1" dirty="0">
                 <a:solidFill>
                   <a:srgbClr val="12110F"/>
                 </a:solidFill>
@@ -21476,7 +21548,7 @@
               </a:spcAft>
             </a:pPr>
             <a:r>
-              <a:rPr sz="1500" b="1">
+              <a:rPr sz="1500" b="1" dirty="0" err="1">
                 <a:solidFill>
                   <a:srgbClr val="12110F"/>
                 </a:solidFill>
@@ -21484,6 +21556,12 @@
               </a:rPr>
               <a:t>eventId</a:t>
             </a:r>
+            <a:endParaRPr sz="1500" b="1" dirty="0">
+              <a:solidFill>
+                <a:srgbClr val="12110F"/>
+              </a:solidFill>
+              <a:latin typeface="Georgia"/>
+            </a:endParaRPr>
           </a:p>
         </p:txBody>
       </p:sp>
@@ -21515,13 +21593,49 @@
               </a:spcAft>
             </a:pPr>
             <a:r>
-              <a:rPr sz="1100" b="0">
+              <a:rPr sz="1100" b="0" dirty="0">
                 <a:solidFill>
                   <a:srgbClr val="6B6560"/>
                 </a:solidFill>
                 <a:latin typeface="Calibri"/>
               </a:rPr>
-              <a:t>GTM keys off hero_order / nav_order. A rewrite of the button does not break measurement.</a:t>
+              <a:t>GTM keys off </a:t>
+            </a:r>
+            <a:r>
+              <a:rPr sz="1100" b="0" dirty="0" err="1">
+                <a:solidFill>
+                  <a:srgbClr val="6B6560"/>
+                </a:solidFill>
+                <a:latin typeface="Calibri"/>
+              </a:rPr>
+              <a:t>hero_order</a:t>
+            </a:r>
+            <a:r>
+              <a:rPr sz="1100" b="0" dirty="0">
+                <a:solidFill>
+                  <a:srgbClr val="6B6560"/>
+                </a:solidFill>
+                <a:latin typeface="Calibri"/>
+              </a:rPr>
+              <a:t> / </a:t>
+            </a:r>
+            <a:r>
+              <a:rPr sz="1100" b="0" dirty="0" err="1">
+                <a:solidFill>
+                  <a:srgbClr val="6B6560"/>
+                </a:solidFill>
+                <a:latin typeface="Calibri"/>
+              </a:rPr>
+              <a:t>nav_order</a:t>
+            </a:r>
+            <a:r>
+              <a:rPr sz="1100" b="0" dirty="0">
+                <a:solidFill>
+                  <a:srgbClr val="6B6560"/>
+                </a:solidFill>
+                <a:latin typeface="Calibri"/>
+              </a:rPr>
+              <a:t>. A rewrite of the button does not break measurement.</a:t>
             </a:r>
           </a:p>
         </p:txBody>
@@ -21726,7 +21840,7 @@
               </a:spcAft>
             </a:pPr>
             <a:r>
-              <a:rPr sz="1100" b="0">
+              <a:rPr sz="1100" b="0" dirty="0">
                 <a:solidFill>
                   <a:srgbClr val="6B6560"/>
                 </a:solidFill>
@@ -21937,7 +22051,7 @@
               </a:spcAft>
             </a:pPr>
             <a:r>
-              <a:rPr sz="1100" b="0">
+              <a:rPr sz="1100" b="0" dirty="0">
                 <a:solidFill>
                   <a:srgbClr val="6B6560"/>
                 </a:solidFill>
